--- a/icbb-website/materials/research-methods/unit-01-slides.pptx
+++ b/icbb-website/materials/research-methods/unit-01-slides.pptx
@@ -877,7 +877,7 @@
           <a:p>
             <a:r>
               <a:rPr lang="en-US" dirty="0"/>
-              <a:t>Take-away: Decide which one you are doing before you collect anything. Teams that start as audit and later try to publish are routinely told the work needed ethical approval it never obtained.</a:t>
+              <a:t>The point: Decide which one you are doing before you collect anything. Teams that start as audit and later try to publish are routinely told the work needed ethical approval it never obtained.</a:t>
             </a:r>
             <a:endParaRPr lang="en-US" dirty="0"/>
           </a:p>
@@ -965,7 +965,7 @@
           <a:p>
             <a:r>
               <a:rPr lang="en-US" dirty="0"/>
-              <a:t>Take-away: Examiners read the paradigm statement and the method side by side. This mismatch is one of the most common reasons for a viva correction.</a:t>
+              <a:t>The point: Examiners read the paradigm statement and the method side by side. This mismatch is one of the most common reasons for a viva correction.</a:t>
             </a:r>
             <a:endParaRPr lang="en-US" dirty="0"/>
           </a:p>
@@ -1317,7 +1317,7 @@
           <a:p>
             <a:r>
               <a:rPr lang="en-US" dirty="0"/>
-              <a:t>Read these out at the start and return to them at the end of the unit.</a:t>
+              <a:t>Read these at the start, and return to them at the end of the unit.</a:t>
             </a:r>
             <a:endParaRPr lang="en-US" dirty="0"/>
           </a:p>
@@ -2037,14 +2037,14 @@
         </p:nvSpPr>
         <p:spPr>
           <a:xfrm>
-            <a:off x="0" y="0"/>
-            <a:ext cx="118872" cy="5148072"/>
+            <a:off x="566928" y="4590288"/>
+            <a:ext cx="8010144" cy="10973"/>
           </a:xfrm>
           <a:prstGeom prst="rect">
             <a:avLst/>
           </a:prstGeom>
           <a:solidFill>
-            <a:srgbClr val="0066CC"/>
+            <a:srgbClr val="D8D3CB"/>
           </a:solidFill>
           <a:ln/>
         </p:spPr>
@@ -2059,7 +2059,7 @@
         </p:nvPicPr>
         <p:blipFill>
           <a:blip r:embed="rId1">
-            <a:alphaModFix amt="18000"/>
+            <a:alphaModFix amt="38000"/>
           </a:blip>
           <a:stretch>
             <a:fillRect/>
@@ -2067,8 +2067,8 @@
         </p:blipFill>
         <p:spPr>
           <a:xfrm>
-            <a:off x="6903720" y="3977640"/>
-            <a:ext cx="1920240" cy="1280160"/>
+            <a:off x="7973568" y="4709160"/>
+            <a:ext cx="566928" cy="374904"/>
           </a:xfrm>
           <a:prstGeom prst="rect">
             <a:avLst/>
@@ -2087,8 +2087,8 @@
         </p:nvSpPr>
         <p:spPr>
           <a:xfrm>
-            <a:off x="8503920" y="4709160"/>
-            <a:ext cx="800000" cy="300000"/>
+            <a:off x="566928" y="4700016"/>
+            <a:ext cx="914400" cy="274320"/>
           </a:xfrm>
           <a:prstGeom prst="rect">
             <a:avLst/>
@@ -2103,10 +2103,13 @@
           <a:bodyPr/>
           <a:lstStyle>
             <a:lvl1pPr>
-              <a:defRPr sz="1000">
-                <a:solidFill>
-                  <a:srgbClr val="6B7280"/>
-                </a:solidFill>
+              <a:defRPr sz="900">
+                <a:solidFill>
+                  <a:srgbClr val="5F6B76"/>
+                </a:solidFill>
+                <a:latin typeface="Corbel"/>
+                <a:ea typeface="Corbel"/>
+                <a:cs typeface="Corbel"/>
               </a:defRPr>
             </a:lvl1pPr>
           </a:lstStyle>
@@ -2134,7 +2137,7 @@
     <p:bg>
       <p:bgPr>
         <a:solidFill>
-          <a:srgbClr val="004D99"/>
+          <a:srgbClr val="132330"/>
         </a:solidFill>
       </p:bgPr>
     </p:bg>
@@ -2160,14 +2163,14 @@
         </p:nvSpPr>
         <p:spPr>
           <a:xfrm>
-            <a:off x="0" y="4526280"/>
-            <a:ext cx="9144000" cy="621792"/>
+            <a:off x="685800" y="1481328"/>
+            <a:ext cx="1051560" cy="25603"/>
           </a:xfrm>
           <a:prstGeom prst="rect">
             <a:avLst/>
           </a:prstGeom>
           <a:solidFill>
-            <a:srgbClr val="00A86B"/>
+            <a:srgbClr val="9A6A3C"/>
           </a:solidFill>
           <a:ln/>
         </p:spPr>
@@ -2182,7 +2185,7 @@
         </p:nvPicPr>
         <p:blipFill>
           <a:blip r:embed="rId1">
-            <a:alphaModFix amt="75000"/>
+            <a:alphaModFix amt="45000"/>
           </a:blip>
           <a:stretch>
             <a:fillRect/>
@@ -2190,8 +2193,8 @@
         </p:blipFill>
         <p:spPr>
           <a:xfrm>
-            <a:off x="7452360" y="384048"/>
-            <a:ext cx="1371600" cy="914400"/>
+            <a:off x="7863840" y="4315968"/>
+            <a:ext cx="676656" cy="448056"/>
           </a:xfrm>
           <a:prstGeom prst="rect">
             <a:avLst/>
@@ -2235,8 +2238,8 @@
         </p:nvSpPr>
         <p:spPr>
           <a:xfrm>
-            <a:off x="8503920" y="4709160"/>
-            <a:ext cx="800000" cy="300000"/>
+            <a:off x="566928" y="4700016"/>
+            <a:ext cx="914400" cy="274320"/>
           </a:xfrm>
           <a:prstGeom prst="rect">
             <a:avLst/>
@@ -2251,10 +2254,13 @@
           <a:bodyPr/>
           <a:lstStyle>
             <a:lvl1pPr>
-              <a:defRPr sz="1000">
-                <a:solidFill>
-                  <a:srgbClr val="6B7280"/>
-                </a:solidFill>
+              <a:defRPr sz="900">
+                <a:solidFill>
+                  <a:srgbClr val="5F6B76"/>
+                </a:solidFill>
+                <a:latin typeface="Corbel"/>
+                <a:ea typeface="Corbel"/>
+                <a:cs typeface="Corbel"/>
               </a:defRPr>
             </a:lvl1pPr>
           </a:lstStyle>
@@ -2555,8 +2561,8 @@
         </p:nvSpPr>
         <p:spPr>
           <a:xfrm>
-            <a:off x="548640" y="1005840"/>
-            <a:ext cx="6675120" cy="274320"/>
+            <a:off x="685800" y="1024128"/>
+            <a:ext cx="6766560" cy="292608"/>
           </a:xfrm>
           <a:prstGeom prst="rect">
             <a:avLst/>
@@ -2572,14 +2578,17 @@
               <a:buNone/>
             </a:pPr>
             <a:r>
-              <a:rPr lang="en-US" sz="1200" b="1" spc="200" kern="0" dirty="0">
-                <a:solidFill>
-                  <a:srgbClr val="00A86B"/>
-                </a:solidFill>
-              </a:rPr>
-              <a:t>ICBB-RM101  ·  UNIT 1 OF 10</a:t>
-            </a:r>
-            <a:endParaRPr lang="en-US" sz="1200" dirty="0"/>
+              <a:rPr lang="en-US" sz="1150" spc="240" kern="0" dirty="0">
+                <a:solidFill>
+                  <a:srgbClr val="C8A67B"/>
+                </a:solidFill>
+                <a:latin typeface="Corbel" pitchFamily="34" charset="0"/>
+                <a:ea typeface="Corbel" pitchFamily="34" charset="-122"/>
+                <a:cs typeface="Corbel" pitchFamily="34" charset="-120"/>
+              </a:rPr>
+              <a:t>ICBB-RM101   ·   Unit 1 of 10</a:t>
+            </a:r>
+            <a:endParaRPr lang="en-US" sz="1150" dirty="0"/>
           </a:p>
         </p:txBody>
       </p:sp>
@@ -2591,8 +2600,8 @@
         </p:nvSpPr>
         <p:spPr>
           <a:xfrm>
-            <a:off x="548640" y="1371600"/>
-            <a:ext cx="6766560" cy="1371600"/>
+            <a:off x="685800" y="1700784"/>
+            <a:ext cx="6858000" cy="1417320"/>
           </a:xfrm>
           <a:prstGeom prst="rect">
             <a:avLst/>
@@ -2605,17 +2614,23 @@
           <a:lstStyle/>
           <a:p>
             <a:pPr indent="0" marL="0">
+              <a:lnSpc>
+                <a:spcPct val="102000"/>
+              </a:lnSpc>
               <a:buNone/>
             </a:pPr>
             <a:r>
-              <a:rPr lang="en-US" sz="3400" b="1" dirty="0">
+              <a:rPr lang="en-US" sz="3300" dirty="0">
                 <a:solidFill>
                   <a:srgbClr val="FFFFFF"/>
                 </a:solidFill>
+                <a:latin typeface="Constantia" pitchFamily="34" charset="0"/>
+                <a:ea typeface="Constantia" pitchFamily="34" charset="-122"/>
+                <a:cs typeface="Constantia" pitchFamily="34" charset="-120"/>
               </a:rPr>
               <a:t>Foundations of Research</a:t>
             </a:r>
-            <a:endParaRPr lang="en-US" sz="3400" dirty="0"/>
+            <a:endParaRPr lang="en-US" sz="3300" dirty="0"/>
           </a:p>
         </p:txBody>
       </p:sp>
@@ -2627,8 +2642,8 @@
         </p:nvSpPr>
         <p:spPr>
           <a:xfrm>
-            <a:off x="548640" y="2788920"/>
-            <a:ext cx="6766560" cy="1188720"/>
+            <a:off x="685800" y="3127248"/>
+            <a:ext cx="6309360" cy="1051560"/>
           </a:xfrm>
           <a:prstGeom prst="rect">
             <a:avLst/>
@@ -2642,19 +2657,22 @@
           <a:p>
             <a:pPr indent="0" marL="0">
               <a:lnSpc>
-                <a:spcPct val="120000"/>
+                <a:spcPct val="128000"/>
               </a:lnSpc>
               <a:buNone/>
             </a:pPr>
             <a:r>
-              <a:rPr lang="en-US" sz="1400" dirty="0">
-                <a:solidFill>
-                  <a:srgbClr val="DCE7F5"/>
-                </a:solidFill>
+              <a:rPr lang="en-US" sz="1350" dirty="0">
+                <a:solidFill>
+                  <a:srgbClr val="B9C2CB"/>
+                </a:solidFill>
+                <a:latin typeface="Corbel" pitchFamily="34" charset="0"/>
+                <a:ea typeface="Corbel" pitchFamily="34" charset="-122"/>
+                <a:cs typeface="Corbel" pitchFamily="34" charset="-120"/>
               </a:rPr>
               <a:t>What separates research from other ways of knowing, the main types of research, and the philosophical positions that quietly shape every methodological choice you will make later.</a:t>
             </a:r>
-            <a:endParaRPr lang="en-US" sz="1400" dirty="0"/>
+            <a:endParaRPr lang="en-US" sz="1350" dirty="0"/>
           </a:p>
         </p:txBody>
       </p:sp>
@@ -2666,8 +2684,8 @@
         </p:nvSpPr>
         <p:spPr>
           <a:xfrm>
-            <a:off x="548640" y="4645152"/>
-            <a:ext cx="5486400" cy="365760"/>
+            <a:off x="685800" y="4407408"/>
+            <a:ext cx="4572000" cy="274320"/>
           </a:xfrm>
           <a:prstGeom prst="rect">
             <a:avLst/>
@@ -2683,14 +2701,17 @@
               <a:buNone/>
             </a:pPr>
             <a:r>
-              <a:rPr lang="en-US" sz="1200" b="1" dirty="0">
-                <a:solidFill>
-                  <a:srgbClr val="FFFFFF"/>
-                </a:solidFill>
-              </a:rPr>
-              <a:t>Jesse Anak  ·  ICBB</a:t>
-            </a:r>
-            <a:endParaRPr lang="en-US" sz="1200" dirty="0"/>
+              <a:rPr lang="en-US" sz="1050" spc="120" kern="0" dirty="0">
+                <a:solidFill>
+                  <a:srgbClr val="8894A0"/>
+                </a:solidFill>
+                <a:latin typeface="Corbel" pitchFamily="34" charset="0"/>
+                <a:ea typeface="Corbel" pitchFamily="34" charset="-122"/>
+                <a:cs typeface="Corbel" pitchFamily="34" charset="-120"/>
+              </a:rPr>
+              <a:t>Jesse Anak   ·   ICBB</a:t>
+            </a:r>
+            <a:endParaRPr lang="en-US" sz="1050" dirty="0"/>
           </a:p>
         </p:txBody>
       </p:sp>
@@ -2727,8 +2748,8 @@
         </p:nvSpPr>
         <p:spPr>
           <a:xfrm>
-            <a:off x="502920" y="292608"/>
-            <a:ext cx="8046720" cy="228600"/>
+            <a:off x="566928" y="384048"/>
+            <a:ext cx="7772400" cy="237744"/>
           </a:xfrm>
           <a:prstGeom prst="rect">
             <a:avLst/>
@@ -2744,14 +2765,17 @@
               <a:buNone/>
             </a:pPr>
             <a:r>
-              <a:rPr lang="en-US" sz="1100" b="1" spc="150" kern="0" dirty="0">
-                <a:solidFill>
-                  <a:srgbClr val="00A86B"/>
-                </a:solidFill>
+              <a:rPr lang="en-US" sz="1000" spc="200" kern="0" dirty="0">
+                <a:solidFill>
+                  <a:srgbClr val="9A6A3C"/>
+                </a:solidFill>
+                <a:latin typeface="Corbel" pitchFamily="34" charset="0"/>
+                <a:ea typeface="Corbel" pitchFamily="34" charset="-122"/>
+                <a:cs typeface="Corbel" pitchFamily="34" charset="-120"/>
               </a:rPr>
               <a:t>UNIT 1</a:t>
             </a:r>
-            <a:endParaRPr lang="en-US" sz="1100" dirty="0"/>
+            <a:endParaRPr lang="en-US" sz="1000" dirty="0"/>
           </a:p>
         </p:txBody>
       </p:sp>
@@ -2763,8 +2787,8 @@
         </p:nvSpPr>
         <p:spPr>
           <a:xfrm>
-            <a:off x="502920" y="548640"/>
-            <a:ext cx="8046720" cy="548640"/>
+            <a:off x="566928" y="658368"/>
+            <a:ext cx="7772400" cy="658368"/>
           </a:xfrm>
           <a:prstGeom prst="rect">
             <a:avLst/>
@@ -2773,21 +2797,27 @@
           <a:ln/>
         </p:spPr>
         <p:txBody>
-          <a:bodyPr wrap="square" rtlCol="0" anchor="ctr"/>
+          <a:bodyPr wrap="square" rtlCol="0" anchor="t"/>
           <a:lstStyle/>
           <a:p>
             <a:pPr indent="0" marL="0">
+              <a:lnSpc>
+                <a:spcPct val="100000"/>
+              </a:lnSpc>
               <a:buNone/>
             </a:pPr>
             <a:r>
-              <a:rPr lang="en-US" sz="2400" b="1" dirty="0">
-                <a:solidFill>
-                  <a:srgbClr val="111827"/>
-                </a:solidFill>
+              <a:rPr lang="en-US" sz="2500" dirty="0">
+                <a:solidFill>
+                  <a:srgbClr val="1C3140"/>
+                </a:solidFill>
+                <a:latin typeface="Constantia" pitchFamily="34" charset="0"/>
+                <a:ea typeface="Constantia" pitchFamily="34" charset="-122"/>
+                <a:cs typeface="Constantia" pitchFamily="34" charset="-120"/>
               </a:rPr>
               <a:t>In practice</a:t>
             </a:r>
-            <a:endParaRPr lang="en-US" sz="2400" dirty="0"/>
+            <a:endParaRPr lang="en-US" sz="2500" dirty="0"/>
           </a:p>
         </p:txBody>
       </p:sp>
@@ -2799,28 +2829,48 @@
         </p:nvSpPr>
         <p:spPr>
           <a:xfrm>
-            <a:off x="502920" y="1280160"/>
-            <a:ext cx="54864" cy="2377440"/>
+            <a:off x="566928" y="1335024"/>
+            <a:ext cx="566928" cy="20117"/>
           </a:xfrm>
           <a:prstGeom prst="rect">
             <a:avLst/>
           </a:prstGeom>
           <a:solidFill>
-            <a:srgbClr val="00A86B"/>
+            <a:srgbClr val="9A6A3C"/>
           </a:solidFill>
           <a:ln/>
         </p:spPr>
       </p:sp>
       <p:sp>
         <p:nvSpPr>
-          <p:cNvPr id="5" name="Text 3"/>
+          <p:cNvPr id="5" name="Shape 3"/>
           <p:cNvSpPr/>
           <p:nvPr/>
         </p:nvSpPr>
         <p:spPr>
           <a:xfrm>
-            <a:off x="777240" y="1280160"/>
-            <a:ext cx="7589520" cy="2377440"/>
+            <a:off x="566928" y="1664208"/>
+            <a:ext cx="8010144" cy="2395728"/>
+          </a:xfrm>
+          <a:prstGeom prst="rect">
+            <a:avLst/>
+          </a:prstGeom>
+          <a:solidFill>
+            <a:srgbClr val="F6F4F0"/>
+          </a:solidFill>
+          <a:ln/>
+        </p:spPr>
+      </p:sp>
+      <p:sp>
+        <p:nvSpPr>
+          <p:cNvPr id="6" name="Text 4"/>
+          <p:cNvSpPr/>
+          <p:nvPr/>
+        </p:nvSpPr>
+        <p:spPr>
+          <a:xfrm>
+            <a:off x="932688" y="1847088"/>
+            <a:ext cx="7278624" cy="2029968"/>
           </a:xfrm>
           <a:prstGeom prst="rect">
             <a:avLst/>
@@ -2834,15 +2884,18 @@
           <a:p>
             <a:pPr indent="0" marL="0">
               <a:lnSpc>
-                <a:spcPct val="130000"/>
+                <a:spcPct val="132000"/>
               </a:lnSpc>
               <a:buNone/>
             </a:pPr>
             <a:r>
-              <a:rPr lang="en-US" sz="1600" dirty="0">
-                <a:solidFill>
-                  <a:srgbClr val="374151"/>
-                </a:solidFill>
+              <a:rPr lang="en-US" sz="1600" i="1" dirty="0">
+                <a:solidFill>
+                  <a:srgbClr val="1C3140"/>
+                </a:solidFill>
+                <a:latin typeface="Constantia" pitchFamily="34" charset="0"/>
+                <a:ea typeface="Constantia" pitchFamily="34" charset="-122"/>
+                <a:cs typeface="Constantia" pitchFamily="34" charset="-120"/>
               </a:rPr>
               <a:t>You do not need to win the philosophical argument. You do need your paradigm, question, design and analysis to be consistent with one another — examiners notice when they are not.</a:t>
             </a:r>
@@ -2862,8 +2915,8 @@
         </p:nvSpPr>
         <p:spPr>
           <a:xfrm>
-            <a:off x="8503920" y="4709160"/>
-            <a:ext cx="800000" cy="300000"/>
+            <a:off x="566928" y="4700016"/>
+            <a:ext cx="914400" cy="274320"/>
           </a:xfrm>
           <a:prstGeom prst="rect">
             <a:avLst/>
@@ -2878,10 +2931,13 @@
           <a:bodyPr/>
           <a:lstStyle>
             <a:lvl1pPr>
-              <a:defRPr sz="1000">
-                <a:solidFill>
-                  <a:srgbClr val="6B7280"/>
-                </a:solidFill>
+              <a:defRPr sz="900">
+                <a:solidFill>
+                  <a:srgbClr val="5F6B76"/>
+                </a:solidFill>
+                <a:latin typeface="Corbel"/>
+                <a:ea typeface="Corbel"/>
+                <a:cs typeface="Corbel"/>
               </a:defRPr>
             </a:lvl1pPr>
           </a:lstStyle>
@@ -2928,8 +2984,8 @@
         </p:nvSpPr>
         <p:spPr>
           <a:xfrm>
-            <a:off x="502920" y="292608"/>
-            <a:ext cx="8046720" cy="228600"/>
+            <a:off x="566928" y="384048"/>
+            <a:ext cx="7772400" cy="237744"/>
           </a:xfrm>
           <a:prstGeom prst="rect">
             <a:avLst/>
@@ -2945,14 +3001,17 @@
               <a:buNone/>
             </a:pPr>
             <a:r>
-              <a:rPr lang="en-US" sz="1100" b="1" spc="150" kern="0" dirty="0">
-                <a:solidFill>
-                  <a:srgbClr val="0066CC"/>
-                </a:solidFill>
+              <a:rPr lang="en-US" sz="1000" spc="200" kern="0" dirty="0">
+                <a:solidFill>
+                  <a:srgbClr val="9A6A3C"/>
+                </a:solidFill>
+                <a:latin typeface="Corbel" pitchFamily="34" charset="0"/>
+                <a:ea typeface="Corbel" pitchFamily="34" charset="-122"/>
+                <a:cs typeface="Corbel" pitchFamily="34" charset="-120"/>
               </a:rPr>
               <a:t>UNIT 1</a:t>
             </a:r>
-            <a:endParaRPr lang="en-US" sz="1100" dirty="0"/>
+            <a:endParaRPr lang="en-US" sz="1000" dirty="0"/>
           </a:p>
         </p:txBody>
       </p:sp>
@@ -2964,8 +3023,8 @@
         </p:nvSpPr>
         <p:spPr>
           <a:xfrm>
-            <a:off x="502920" y="548640"/>
-            <a:ext cx="8046720" cy="640080"/>
+            <a:off x="566928" y="658368"/>
+            <a:ext cx="7772400" cy="658368"/>
           </a:xfrm>
           <a:prstGeom prst="rect">
             <a:avLst/>
@@ -2978,30 +3037,56 @@
           <a:lstStyle/>
           <a:p>
             <a:pPr indent="0" marL="0">
+              <a:lnSpc>
+                <a:spcPct val="100000"/>
+              </a:lnSpc>
               <a:buNone/>
             </a:pPr>
             <a:r>
-              <a:rPr lang="en-US" sz="2400" b="1" dirty="0">
-                <a:solidFill>
-                  <a:srgbClr val="111827"/>
-                </a:solidFill>
+              <a:rPr lang="en-US" sz="2500" dirty="0">
+                <a:solidFill>
+                  <a:srgbClr val="1C3140"/>
+                </a:solidFill>
+                <a:latin typeface="Constantia" pitchFamily="34" charset="0"/>
+                <a:ea typeface="Constantia" pitchFamily="34" charset="-122"/>
+                <a:cs typeface="Constantia" pitchFamily="34" charset="-120"/>
               </a:rPr>
               <a:t>The research process (1/2)</a:t>
             </a:r>
-            <a:endParaRPr lang="en-US" sz="2400" dirty="0"/>
-          </a:p>
-        </p:txBody>
-      </p:sp>
-      <p:sp>
-        <p:nvSpPr>
-          <p:cNvPr id="4" name="Text 2"/>
+            <a:endParaRPr lang="en-US" sz="2500" dirty="0"/>
+          </a:p>
+        </p:txBody>
+      </p:sp>
+      <p:sp>
+        <p:nvSpPr>
+          <p:cNvPr id="4" name="Shape 2"/>
           <p:cNvSpPr/>
           <p:nvPr/>
         </p:nvSpPr>
         <p:spPr>
           <a:xfrm>
-            <a:off x="685800" y="1325880"/>
-            <a:ext cx="7772400" cy="3200400"/>
+            <a:off x="566928" y="1335024"/>
+            <a:ext cx="566928" cy="20117"/>
+          </a:xfrm>
+          <a:prstGeom prst="rect">
+            <a:avLst/>
+          </a:prstGeom>
+          <a:solidFill>
+            <a:srgbClr val="9A6A3C"/>
+          </a:solidFill>
+          <a:ln/>
+        </p:spPr>
+      </p:sp>
+      <p:sp>
+        <p:nvSpPr>
+          <p:cNvPr id="5" name="Text 3"/>
+          <p:cNvSpPr/>
+          <p:nvPr/>
+        </p:nvSpPr>
+        <p:spPr>
+          <a:xfrm>
+            <a:off x="713232" y="1664208"/>
+            <a:ext cx="7498080" cy="2788920"/>
           </a:xfrm>
           <a:prstGeom prst="rect">
             <a:avLst/>
@@ -3015,19 +3100,22 @@
           <a:p>
             <a:pPr marL="342900" indent="-342900">
               <a:lnSpc>
-                <a:spcPct val="125000"/>
+                <a:spcPct val="130000"/>
               </a:lnSpc>
               <a:spcAft>
-                <a:spcPts val="800"/>
+                <a:spcPts val="1100"/>
               </a:spcAft>
               <a:buSzPct val="100000"/>
-              <a:buChar char="•"/>
+              <a:buChar char="–"/>
             </a:pPr>
             <a:r>
               <a:rPr lang="en-US" sz="1800" dirty="0">
                 <a:solidFill>
-                  <a:srgbClr val="374151"/>
-                </a:solidFill>
+                  <a:srgbClr val="23282E"/>
+                </a:solidFill>
+                <a:latin typeface="Corbel" pitchFamily="34" charset="0"/>
+                <a:ea typeface="Corbel" pitchFamily="34" charset="-122"/>
+                <a:cs typeface="Corbel" pitchFamily="34" charset="-120"/>
               </a:rPr>
               <a:t>Identify a problem worth solving and confirm it is not already solved</a:t>
             </a:r>
@@ -3036,19 +3124,22 @@
           <a:p>
             <a:pPr marL="342900" indent="-342900">
               <a:lnSpc>
-                <a:spcPct val="125000"/>
+                <a:spcPct val="130000"/>
               </a:lnSpc>
               <a:spcAft>
-                <a:spcPts val="800"/>
+                <a:spcPts val="1100"/>
               </a:spcAft>
               <a:buSzPct val="100000"/>
-              <a:buChar char="•"/>
+              <a:buChar char="–"/>
             </a:pPr>
             <a:r>
               <a:rPr lang="en-US" sz="1800" dirty="0">
                 <a:solidFill>
-                  <a:srgbClr val="374151"/>
-                </a:solidFill>
+                  <a:srgbClr val="23282E"/>
+                </a:solidFill>
+                <a:latin typeface="Corbel" pitchFamily="34" charset="0"/>
+                <a:ea typeface="Corbel" pitchFamily="34" charset="-122"/>
+                <a:cs typeface="Corbel" pitchFamily="34" charset="-120"/>
               </a:rPr>
               <a:t>Review the literature and locate the gap precisely</a:t>
             </a:r>
@@ -3057,19 +3148,22 @@
           <a:p>
             <a:pPr marL="342900" indent="-342900">
               <a:lnSpc>
-                <a:spcPct val="125000"/>
+                <a:spcPct val="130000"/>
               </a:lnSpc>
               <a:spcAft>
-                <a:spcPts val="800"/>
+                <a:spcPts val="1100"/>
               </a:spcAft>
               <a:buSzPct val="100000"/>
-              <a:buChar char="•"/>
+              <a:buChar char="–"/>
             </a:pPr>
             <a:r>
               <a:rPr lang="en-US" sz="1800" dirty="0">
                 <a:solidFill>
-                  <a:srgbClr val="374151"/>
-                </a:solidFill>
+                  <a:srgbClr val="23282E"/>
+                </a:solidFill>
+                <a:latin typeface="Corbel" pitchFamily="34" charset="0"/>
+                <a:ea typeface="Corbel" pitchFamily="34" charset="-122"/>
+                <a:cs typeface="Corbel" pitchFamily="34" charset="-120"/>
               </a:rPr>
               <a:t>State the question, aims, objectives and (if quantitative) hypotheses</a:t>
             </a:r>
@@ -3078,19 +3172,22 @@
           <a:p>
             <a:pPr marL="342900" indent="-342900">
               <a:lnSpc>
-                <a:spcPct val="125000"/>
+                <a:spcPct val="130000"/>
               </a:lnSpc>
               <a:spcAft>
-                <a:spcPts val="800"/>
+                <a:spcPts val="1100"/>
               </a:spcAft>
               <a:buSzPct val="100000"/>
-              <a:buChar char="•"/>
+              <a:buChar char="–"/>
             </a:pPr>
             <a:r>
               <a:rPr lang="en-US" sz="1800" dirty="0">
                 <a:solidFill>
-                  <a:srgbClr val="374151"/>
-                </a:solidFill>
+                  <a:srgbClr val="23282E"/>
+                </a:solidFill>
+                <a:latin typeface="Corbel" pitchFamily="34" charset="0"/>
+                <a:ea typeface="Corbel" pitchFamily="34" charset="-122"/>
+                <a:cs typeface="Corbel" pitchFamily="34" charset="-120"/>
               </a:rPr>
               <a:t>Choose a design, population, sample and instruments</a:t>
             </a:r>
@@ -3099,19 +3196,22 @@
           <a:p>
             <a:pPr marL="342900" indent="-342900">
               <a:lnSpc>
-                <a:spcPct val="125000"/>
+                <a:spcPct val="130000"/>
               </a:lnSpc>
               <a:spcAft>
-                <a:spcPts val="800"/>
+                <a:spcPts val="1100"/>
               </a:spcAft>
               <a:buSzPct val="100000"/>
-              <a:buChar char="•"/>
+              <a:buChar char="–"/>
             </a:pPr>
             <a:r>
               <a:rPr lang="en-US" sz="1800" dirty="0">
                 <a:solidFill>
-                  <a:srgbClr val="374151"/>
-                </a:solidFill>
+                  <a:srgbClr val="23282E"/>
+                </a:solidFill>
+                <a:latin typeface="Corbel" pitchFamily="34" charset="0"/>
+                <a:ea typeface="Corbel" pitchFamily="34" charset="-122"/>
+                <a:cs typeface="Corbel" pitchFamily="34" charset="-120"/>
               </a:rPr>
               <a:t>Obtain ethical approval before collecting anything</a:t>
             </a:r>
@@ -3131,8 +3231,8 @@
         </p:nvSpPr>
         <p:spPr>
           <a:xfrm>
-            <a:off x="8503920" y="4709160"/>
-            <a:ext cx="800000" cy="300000"/>
+            <a:off x="566928" y="4700016"/>
+            <a:ext cx="914400" cy="274320"/>
           </a:xfrm>
           <a:prstGeom prst="rect">
             <a:avLst/>
@@ -3147,10 +3247,13 @@
           <a:bodyPr/>
           <a:lstStyle>
             <a:lvl1pPr>
-              <a:defRPr sz="1000">
-                <a:solidFill>
-                  <a:srgbClr val="6B7280"/>
-                </a:solidFill>
+              <a:defRPr sz="900">
+                <a:solidFill>
+                  <a:srgbClr val="5F6B76"/>
+                </a:solidFill>
+                <a:latin typeface="Corbel"/>
+                <a:ea typeface="Corbel"/>
+                <a:cs typeface="Corbel"/>
               </a:defRPr>
             </a:lvl1pPr>
           </a:lstStyle>
@@ -3197,8 +3300,8 @@
         </p:nvSpPr>
         <p:spPr>
           <a:xfrm>
-            <a:off x="502920" y="292608"/>
-            <a:ext cx="8046720" cy="228600"/>
+            <a:off x="566928" y="384048"/>
+            <a:ext cx="7772400" cy="237744"/>
           </a:xfrm>
           <a:prstGeom prst="rect">
             <a:avLst/>
@@ -3214,14 +3317,17 @@
               <a:buNone/>
             </a:pPr>
             <a:r>
-              <a:rPr lang="en-US" sz="1100" b="1" spc="150" kern="0" dirty="0">
-                <a:solidFill>
-                  <a:srgbClr val="0066CC"/>
-                </a:solidFill>
+              <a:rPr lang="en-US" sz="1000" spc="200" kern="0" dirty="0">
+                <a:solidFill>
+                  <a:srgbClr val="9A6A3C"/>
+                </a:solidFill>
+                <a:latin typeface="Corbel" pitchFamily="34" charset="0"/>
+                <a:ea typeface="Corbel" pitchFamily="34" charset="-122"/>
+                <a:cs typeface="Corbel" pitchFamily="34" charset="-120"/>
               </a:rPr>
               <a:t>UNIT 1</a:t>
             </a:r>
-            <a:endParaRPr lang="en-US" sz="1100" dirty="0"/>
+            <a:endParaRPr lang="en-US" sz="1000" dirty="0"/>
           </a:p>
         </p:txBody>
       </p:sp>
@@ -3233,8 +3339,8 @@
         </p:nvSpPr>
         <p:spPr>
           <a:xfrm>
-            <a:off x="502920" y="548640"/>
-            <a:ext cx="8046720" cy="640080"/>
+            <a:off x="566928" y="658368"/>
+            <a:ext cx="7772400" cy="658368"/>
           </a:xfrm>
           <a:prstGeom prst="rect">
             <a:avLst/>
@@ -3247,30 +3353,56 @@
           <a:lstStyle/>
           <a:p>
             <a:pPr indent="0" marL="0">
+              <a:lnSpc>
+                <a:spcPct val="100000"/>
+              </a:lnSpc>
               <a:buNone/>
             </a:pPr>
             <a:r>
-              <a:rPr lang="en-US" sz="2400" b="1" dirty="0">
-                <a:solidFill>
-                  <a:srgbClr val="111827"/>
-                </a:solidFill>
+              <a:rPr lang="en-US" sz="2500" dirty="0">
+                <a:solidFill>
+                  <a:srgbClr val="1C3140"/>
+                </a:solidFill>
+                <a:latin typeface="Constantia" pitchFamily="34" charset="0"/>
+                <a:ea typeface="Constantia" pitchFamily="34" charset="-122"/>
+                <a:cs typeface="Constantia" pitchFamily="34" charset="-120"/>
               </a:rPr>
               <a:t>The research process (2/2)</a:t>
             </a:r>
-            <a:endParaRPr lang="en-US" sz="2400" dirty="0"/>
-          </a:p>
-        </p:txBody>
-      </p:sp>
-      <p:sp>
-        <p:nvSpPr>
-          <p:cNvPr id="4" name="Text 2"/>
+            <a:endParaRPr lang="en-US" sz="2500" dirty="0"/>
+          </a:p>
+        </p:txBody>
+      </p:sp>
+      <p:sp>
+        <p:nvSpPr>
+          <p:cNvPr id="4" name="Shape 2"/>
           <p:cNvSpPr/>
           <p:nvPr/>
         </p:nvSpPr>
         <p:spPr>
           <a:xfrm>
-            <a:off x="685800" y="1325880"/>
-            <a:ext cx="7772400" cy="3200400"/>
+            <a:off x="566928" y="1335024"/>
+            <a:ext cx="566928" cy="20117"/>
+          </a:xfrm>
+          <a:prstGeom prst="rect">
+            <a:avLst/>
+          </a:prstGeom>
+          <a:solidFill>
+            <a:srgbClr val="9A6A3C"/>
+          </a:solidFill>
+          <a:ln/>
+        </p:spPr>
+      </p:sp>
+      <p:sp>
+        <p:nvSpPr>
+          <p:cNvPr id="5" name="Text 3"/>
+          <p:cNvSpPr/>
+          <p:nvPr/>
+        </p:nvSpPr>
+        <p:spPr>
+          <a:xfrm>
+            <a:off x="713232" y="1664208"/>
+            <a:ext cx="7498080" cy="2788920"/>
           </a:xfrm>
           <a:prstGeom prst="rect">
             <a:avLst/>
@@ -3284,65 +3416,74 @@
           <a:p>
             <a:pPr marL="342900" indent="-342900">
               <a:lnSpc>
-                <a:spcPct val="125000"/>
+                <a:spcPct val="130000"/>
               </a:lnSpc>
               <a:spcAft>
-                <a:spcPts val="800"/>
+                <a:spcPts val="1100"/>
               </a:spcAft>
               <a:buSzPct val="100000"/>
-              <a:buChar char="•"/>
-            </a:pPr>
-            <a:r>
-              <a:rPr lang="en-US" sz="1700" dirty="0">
-                <a:solidFill>
-                  <a:srgbClr val="374151"/>
-                </a:solidFill>
+              <a:buChar char="–"/>
+            </a:pPr>
+            <a:r>
+              <a:rPr lang="en-US" sz="1650" dirty="0">
+                <a:solidFill>
+                  <a:srgbClr val="23282E"/>
+                </a:solidFill>
+                <a:latin typeface="Corbel" pitchFamily="34" charset="0"/>
+                <a:ea typeface="Corbel" pitchFamily="34" charset="-122"/>
+                <a:cs typeface="Corbel" pitchFamily="34" charset="-120"/>
               </a:rPr>
               <a:t>Collect, manage and analyse data</a:t>
             </a:r>
-            <a:endParaRPr lang="en-US" sz="1700" dirty="0"/>
+            <a:endParaRPr lang="en-US" sz="1650" dirty="0"/>
           </a:p>
           <a:p>
             <a:pPr marL="342900" indent="-342900">
               <a:lnSpc>
-                <a:spcPct val="125000"/>
+                <a:spcPct val="130000"/>
               </a:lnSpc>
               <a:spcAft>
-                <a:spcPts val="800"/>
+                <a:spcPts val="1100"/>
               </a:spcAft>
               <a:buSzPct val="100000"/>
-              <a:buChar char="•"/>
-            </a:pPr>
-            <a:r>
-              <a:rPr lang="en-US" sz="1700" dirty="0">
-                <a:solidFill>
-                  <a:srgbClr val="374151"/>
-                </a:solidFill>
+              <a:buChar char="–"/>
+            </a:pPr>
+            <a:r>
+              <a:rPr lang="en-US" sz="1650" dirty="0">
+                <a:solidFill>
+                  <a:srgbClr val="23282E"/>
+                </a:solidFill>
+                <a:latin typeface="Corbel" pitchFamily="34" charset="0"/>
+                <a:ea typeface="Corbel" pitchFamily="34" charset="-122"/>
+                <a:cs typeface="Corbel" pitchFamily="34" charset="-120"/>
               </a:rPr>
               <a:t>Interpret against the literature, then report and disseminate</a:t>
             </a:r>
-            <a:endParaRPr lang="en-US" sz="1700" dirty="0"/>
+            <a:endParaRPr lang="en-US" sz="1650" dirty="0"/>
           </a:p>
           <a:p>
             <a:pPr marL="342900" indent="-342900">
               <a:lnSpc>
-                <a:spcPct val="125000"/>
+                <a:spcPct val="130000"/>
               </a:lnSpc>
               <a:spcAft>
-                <a:spcPts val="800"/>
+                <a:spcPts val="1100"/>
               </a:spcAft>
               <a:buSzPct val="100000"/>
-              <a:buChar char="•"/>
-            </a:pPr>
-            <a:r>
-              <a:rPr lang="en-US" sz="1700" dirty="0">
-                <a:solidFill>
-                  <a:srgbClr val="374151"/>
-                </a:solidFill>
+              <a:buChar char="–"/>
+            </a:pPr>
+            <a:r>
+              <a:rPr lang="en-US" sz="1650" dirty="0">
+                <a:solidFill>
+                  <a:srgbClr val="23282E"/>
+                </a:solidFill>
+                <a:latin typeface="Corbel" pitchFamily="34" charset="0"/>
+                <a:ea typeface="Corbel" pitchFamily="34" charset="-122"/>
+                <a:cs typeface="Corbel" pitchFamily="34" charset="-120"/>
               </a:rPr>
               <a:t>The process is iterative in practice — the literature review continues until you submit</a:t>
             </a:r>
-            <a:endParaRPr lang="en-US" sz="1700" dirty="0"/>
+            <a:endParaRPr lang="en-US" sz="1650" dirty="0"/>
           </a:p>
         </p:txBody>
       </p:sp>
@@ -3358,8 +3499,8 @@
         </p:nvSpPr>
         <p:spPr>
           <a:xfrm>
-            <a:off x="8503920" y="4709160"/>
-            <a:ext cx="800000" cy="300000"/>
+            <a:off x="566928" y="4700016"/>
+            <a:ext cx="914400" cy="274320"/>
           </a:xfrm>
           <a:prstGeom prst="rect">
             <a:avLst/>
@@ -3374,10 +3515,13 @@
           <a:bodyPr/>
           <a:lstStyle>
             <a:lvl1pPr>
-              <a:defRPr sz="1000">
-                <a:solidFill>
-                  <a:srgbClr val="6B7280"/>
-                </a:solidFill>
+              <a:defRPr sz="900">
+                <a:solidFill>
+                  <a:srgbClr val="5F6B76"/>
+                </a:solidFill>
+                <a:latin typeface="Corbel"/>
+                <a:ea typeface="Corbel"/>
+                <a:cs typeface="Corbel"/>
               </a:defRPr>
             </a:lvl1pPr>
           </a:lstStyle>
@@ -3424,8 +3568,8 @@
         </p:nvSpPr>
         <p:spPr>
           <a:xfrm>
-            <a:off x="502920" y="292608"/>
-            <a:ext cx="8046720" cy="228600"/>
+            <a:off x="566928" y="384048"/>
+            <a:ext cx="7772400" cy="237744"/>
           </a:xfrm>
           <a:prstGeom prst="rect">
             <a:avLst/>
@@ -3441,14 +3585,17 @@
               <a:buNone/>
             </a:pPr>
             <a:r>
-              <a:rPr lang="en-US" sz="1100" b="1" spc="150" kern="0" dirty="0">
-                <a:solidFill>
-                  <a:srgbClr val="00A86B"/>
-                </a:solidFill>
+              <a:rPr lang="en-US" sz="1000" spc="200" kern="0" dirty="0">
+                <a:solidFill>
+                  <a:srgbClr val="9A6A3C"/>
+                </a:solidFill>
+                <a:latin typeface="Corbel" pitchFamily="34" charset="0"/>
+                <a:ea typeface="Corbel" pitchFamily="34" charset="-122"/>
+                <a:cs typeface="Corbel" pitchFamily="34" charset="-120"/>
               </a:rPr>
               <a:t>UNIT 1  ·  WORKED EXAMPLE</a:t>
             </a:r>
-            <a:endParaRPr lang="en-US" sz="1100" dirty="0"/>
+            <a:endParaRPr lang="en-US" sz="1000" dirty="0"/>
           </a:p>
         </p:txBody>
       </p:sp>
@@ -3460,8 +3607,8 @@
         </p:nvSpPr>
         <p:spPr>
           <a:xfrm>
-            <a:off x="502920" y="548640"/>
-            <a:ext cx="8046720" cy="566928"/>
+            <a:off x="566928" y="658368"/>
+            <a:ext cx="7772400" cy="658368"/>
           </a:xfrm>
           <a:prstGeom prst="rect">
             <a:avLst/>
@@ -3474,17 +3621,23 @@
           <a:lstStyle/>
           <a:p>
             <a:pPr indent="0" marL="0">
+              <a:lnSpc>
+                <a:spcPct val="100000"/>
+              </a:lnSpc>
               <a:buNone/>
             </a:pPr>
             <a:r>
-              <a:rPr lang="en-US" sz="2300" b="1" dirty="0">
-                <a:solidFill>
-                  <a:srgbClr val="111827"/>
-                </a:solidFill>
+              <a:rPr lang="en-US" sz="2500" dirty="0">
+                <a:solidFill>
+                  <a:srgbClr val="1C3140"/>
+                </a:solidFill>
+                <a:latin typeface="Constantia" pitchFamily="34" charset="0"/>
+                <a:ea typeface="Constantia" pitchFamily="34" charset="-122"/>
+                <a:cs typeface="Constantia" pitchFamily="34" charset="-120"/>
               </a:rPr>
               <a:t>Audit or research? The same data, two different studies</a:t>
             </a:r>
-            <a:endParaRPr lang="en-US" sz="2300" dirty="0"/>
+            <a:endParaRPr lang="en-US" sz="2500" dirty="0"/>
           </a:p>
         </p:txBody>
       </p:sp>
@@ -3496,21 +3649,16 @@
         </p:nvSpPr>
         <p:spPr>
           <a:xfrm>
-            <a:off x="502920" y="1207008"/>
-            <a:ext cx="8138160" cy="3200400"/>
+            <a:off x="566928" y="1335024"/>
+            <a:ext cx="566928" cy="20117"/>
           </a:xfrm>
           <a:prstGeom prst="rect">
             <a:avLst/>
           </a:prstGeom>
           <a:solidFill>
-            <a:srgbClr val="F3F7FC"/>
+            <a:srgbClr val="9A6A3C"/>
           </a:solidFill>
-          <a:ln w="9525">
-            <a:solidFill>
-              <a:srgbClr val="0066CC"/>
-            </a:solidFill>
-            <a:prstDash val="solid"/>
-          </a:ln>
+          <a:ln/>
         </p:spPr>
       </p:sp>
       <p:sp>
@@ -3521,8 +3669,8 @@
         </p:nvSpPr>
         <p:spPr>
           <a:xfrm>
-            <a:off x="731520" y="1371600"/>
-            <a:ext cx="7680960" cy="1005840"/>
+            <a:off x="566928" y="1645920"/>
+            <a:ext cx="8010144" cy="822960"/>
           </a:xfrm>
           <a:prstGeom prst="rect">
             <a:avLst/>
@@ -3535,137 +3683,170 @@
           <a:lstStyle/>
           <a:p>
             <a:pPr indent="0" marL="0">
+              <a:lnSpc>
+                <a:spcPct val="124000"/>
+              </a:lnSpc>
+              <a:buNone/>
+            </a:pPr>
+            <a:r>
+              <a:rPr lang="en-US" sz="1300" i="1" dirty="0">
+                <a:solidFill>
+                  <a:srgbClr val="5F6B76"/>
+                </a:solidFill>
+                <a:latin typeface="Constantia" pitchFamily="34" charset="0"/>
+                <a:ea typeface="Constantia" pitchFamily="34" charset="-122"/>
+                <a:cs typeface="Constantia" pitchFamily="34" charset="-120"/>
+              </a:rPr>
+              <a:t>A district hospital notices that 1 in 5 women who book antenatal care never return for a second visit. The medical director asks a midwife to "look into it".</a:t>
+            </a:r>
+            <a:endParaRPr lang="en-US" sz="1300" dirty="0"/>
+          </a:p>
+        </p:txBody>
+      </p:sp>
+      <p:sp>
+        <p:nvSpPr>
+          <p:cNvPr id="6" name="Text 4"/>
+          <p:cNvSpPr/>
+          <p:nvPr/>
+        </p:nvSpPr>
+        <p:spPr>
+          <a:xfrm>
+            <a:off x="786384" y="2523744"/>
+            <a:ext cx="7406640" cy="1920240"/>
+          </a:xfrm>
+          <a:prstGeom prst="rect">
+            <a:avLst/>
+          </a:prstGeom>
+          <a:noFill/>
+          <a:ln/>
+        </p:spPr>
+        <p:txBody>
+          <a:bodyPr wrap="square" rtlCol="0" anchor="t"/>
+          <a:lstStyle/>
+          <a:p>
+            <a:pPr marL="342900" indent="-342900">
               <a:lnSpc>
                 <a:spcPct val="120000"/>
               </a:lnSpc>
-              <a:buNone/>
-            </a:pPr>
-            <a:r>
-              <a:rPr lang="en-US" sz="1400" i="1" dirty="0">
-                <a:solidFill>
-                  <a:srgbClr val="374151"/>
-                </a:solidFill>
-              </a:rPr>
-              <a:t>A district hospital notices that 1 in 5 women who book antenatal care never return for a second visit. The medical director asks a midwife to "look into it".</a:t>
-            </a:r>
-            <a:endParaRPr lang="en-US" sz="1400" dirty="0"/>
-          </a:p>
-        </p:txBody>
-      </p:sp>
-      <p:sp>
-        <p:nvSpPr>
-          <p:cNvPr id="6" name="Text 4"/>
-          <p:cNvSpPr/>
-          <p:nvPr/>
-        </p:nvSpPr>
-        <p:spPr>
-          <a:xfrm>
-            <a:off x="868680" y="2395728"/>
-            <a:ext cx="7452360" cy="1920240"/>
-          </a:xfrm>
-          <a:prstGeom prst="rect">
-            <a:avLst/>
-          </a:prstGeom>
-          <a:noFill/>
-          <a:ln/>
-        </p:spPr>
-        <p:txBody>
-          <a:bodyPr wrap="square" rtlCol="0" anchor="t"/>
-          <a:lstStyle/>
-          <a:p>
-            <a:pPr marL="342900" indent="-342900">
-              <a:lnSpc>
-                <a:spcPct val="115000"/>
-              </a:lnSpc>
+              <a:spcAft>
+                <a:spcPts val="500"/>
+              </a:spcAft>
               <a:buSzPct val="100000"/>
               <a:buFont typeface="+mj-lt"/>
               <a:buAutoNum type="arabicPeriod" startAt="1"/>
             </a:pPr>
             <a:r>
-              <a:rPr lang="en-US" sz="1300" dirty="0">
-                <a:solidFill>
-                  <a:srgbClr val="374151"/>
-                </a:solidFill>
+              <a:rPr lang="en-US" sz="1250" dirty="0">
+                <a:solidFill>
+                  <a:srgbClr val="23282E"/>
+                </a:solidFill>
+                <a:latin typeface="Corbel" pitchFamily="34" charset="0"/>
+                <a:ea typeface="Corbel" pitchFamily="34" charset="-122"/>
+                <a:cs typeface="Corbel" pitchFamily="34" charset="-120"/>
               </a:rPr>
               <a:t>If she compares the return rate against the national target of 4+ visits, that is audit — the standard already exists and she is measuring compliance.</a:t>
             </a:r>
-            <a:endParaRPr lang="en-US" sz="1300" dirty="0"/>
+            <a:endParaRPr lang="en-US" sz="1250" dirty="0"/>
           </a:p>
           <a:p>
             <a:pPr marL="342900" indent="-342900">
               <a:lnSpc>
-                <a:spcPct val="115000"/>
+                <a:spcPct val="120000"/>
               </a:lnSpc>
+              <a:spcAft>
+                <a:spcPts val="500"/>
+              </a:spcAft>
               <a:buSzPct val="100000"/>
               <a:buFont typeface="+mj-lt"/>
               <a:buAutoNum type="arabicPeriod" startAt="1"/>
             </a:pPr>
             <a:r>
-              <a:rPr lang="en-US" sz="1300" dirty="0">
-                <a:solidFill>
-                  <a:srgbClr val="374151"/>
-                </a:solidFill>
+              <a:rPr lang="en-US" sz="1250" dirty="0">
+                <a:solidFill>
+                  <a:srgbClr val="23282E"/>
+                </a:solidFill>
+                <a:latin typeface="Corbel" pitchFamily="34" charset="0"/>
+                <a:ea typeface="Corbel" pitchFamily="34" charset="-122"/>
+                <a:cs typeface="Corbel" pitchFamily="34" charset="-120"/>
               </a:rPr>
               <a:t>If she asks why women do not return, and the answer is not already known, that is research.</a:t>
             </a:r>
-            <a:endParaRPr lang="en-US" sz="1300" dirty="0"/>
+            <a:endParaRPr lang="en-US" sz="1250" dirty="0"/>
           </a:p>
           <a:p>
             <a:pPr marL="342900" indent="-342900">
               <a:lnSpc>
-                <a:spcPct val="115000"/>
+                <a:spcPct val="120000"/>
               </a:lnSpc>
+              <a:spcAft>
+                <a:spcPts val="500"/>
+              </a:spcAft>
               <a:buSzPct val="100000"/>
               <a:buFont typeface="+mj-lt"/>
               <a:buAutoNum type="arabicPeriod" startAt="1"/>
             </a:pPr>
             <a:r>
-              <a:rPr lang="en-US" sz="1300" dirty="0">
-                <a:solidFill>
-                  <a:srgbClr val="374151"/>
-                </a:solidFill>
+              <a:rPr lang="en-US" sz="1250" dirty="0">
+                <a:solidFill>
+                  <a:srgbClr val="23282E"/>
+                </a:solidFill>
+                <a:latin typeface="Corbel" pitchFamily="34" charset="0"/>
+                <a:ea typeface="Corbel" pitchFamily="34" charset="-122"/>
+                <a:cs typeface="Corbel" pitchFamily="34" charset="-120"/>
               </a:rPr>
               <a:t>The same appointment records serve both. What separates them is the question, not the data.</a:t>
             </a:r>
-            <a:endParaRPr lang="en-US" sz="1300" dirty="0"/>
+            <a:endParaRPr lang="en-US" sz="1250" dirty="0"/>
           </a:p>
           <a:p>
             <a:pPr marL="342900" indent="-342900">
               <a:lnSpc>
-                <a:spcPct val="115000"/>
+                <a:spcPct val="120000"/>
               </a:lnSpc>
+              <a:spcAft>
+                <a:spcPts val="500"/>
+              </a:spcAft>
               <a:buSzPct val="100000"/>
               <a:buFont typeface="+mj-lt"/>
               <a:buAutoNum type="arabicPeriod" startAt="1"/>
             </a:pPr>
             <a:r>
-              <a:rPr lang="en-US" sz="1300" dirty="0">
-                <a:solidFill>
-                  <a:srgbClr val="374151"/>
-                </a:solidFill>
+              <a:rPr lang="en-US" sz="1250" dirty="0">
+                <a:solidFill>
+                  <a:srgbClr val="23282E"/>
+                </a:solidFill>
+                <a:latin typeface="Corbel" pitchFamily="34" charset="0"/>
+                <a:ea typeface="Corbel" pitchFamily="34" charset="-122"/>
+                <a:cs typeface="Corbel" pitchFamily="34" charset="-120"/>
               </a:rPr>
               <a:t>The research version needs ethical approval, a sampling strategy and a defined method; the audit does not.</a:t>
             </a:r>
-            <a:endParaRPr lang="en-US" sz="1300" dirty="0"/>
+            <a:endParaRPr lang="en-US" sz="1250" dirty="0"/>
           </a:p>
           <a:p>
             <a:pPr marL="342900" indent="-342900">
               <a:lnSpc>
-                <a:spcPct val="115000"/>
+                <a:spcPct val="120000"/>
               </a:lnSpc>
+              <a:spcAft>
+                <a:spcPts val="500"/>
+              </a:spcAft>
               <a:buSzPct val="100000"/>
               <a:buFont typeface="+mj-lt"/>
               <a:buAutoNum type="arabicPeriod" startAt="1"/>
             </a:pPr>
             <a:r>
-              <a:rPr lang="en-US" sz="1300" dirty="0">
-                <a:solidFill>
-                  <a:srgbClr val="374151"/>
-                </a:solidFill>
+              <a:rPr lang="en-US" sz="1250" dirty="0">
+                <a:solidFill>
+                  <a:srgbClr val="23282E"/>
+                </a:solidFill>
+                <a:latin typeface="Corbel" pitchFamily="34" charset="0"/>
+                <a:ea typeface="Corbel" pitchFamily="34" charset="-122"/>
+                <a:cs typeface="Corbel" pitchFamily="34" charset="-120"/>
               </a:rPr>
               <a:t>She could do both: audit to establish the size of the problem, then research to explain it.</a:t>
             </a:r>
-            <a:endParaRPr lang="en-US" sz="1300" dirty="0"/>
+            <a:endParaRPr lang="en-US" sz="1250" dirty="0"/>
           </a:p>
         </p:txBody>
       </p:sp>
@@ -3681,8 +3862,8 @@
         </p:nvSpPr>
         <p:spPr>
           <a:xfrm>
-            <a:off x="8503920" y="4709160"/>
-            <a:ext cx="800000" cy="300000"/>
+            <a:off x="566928" y="4700016"/>
+            <a:ext cx="914400" cy="274320"/>
           </a:xfrm>
           <a:prstGeom prst="rect">
             <a:avLst/>
@@ -3697,10 +3878,13 @@
           <a:bodyPr/>
           <a:lstStyle>
             <a:lvl1pPr>
-              <a:defRPr sz="1000">
-                <a:solidFill>
-                  <a:srgbClr val="6B7280"/>
-                </a:solidFill>
+              <a:defRPr sz="900">
+                <a:solidFill>
+                  <a:srgbClr val="5F6B76"/>
+                </a:solidFill>
+                <a:latin typeface="Corbel"/>
+                <a:ea typeface="Corbel"/>
+                <a:cs typeface="Corbel"/>
               </a:defRPr>
             </a:lvl1pPr>
           </a:lstStyle>
@@ -3747,8 +3931,8 @@
         </p:nvSpPr>
         <p:spPr>
           <a:xfrm>
-            <a:off x="502920" y="292608"/>
-            <a:ext cx="8046720" cy="228600"/>
+            <a:off x="566928" y="384048"/>
+            <a:ext cx="7772400" cy="237744"/>
           </a:xfrm>
           <a:prstGeom prst="rect">
             <a:avLst/>
@@ -3764,14 +3948,17 @@
               <a:buNone/>
             </a:pPr>
             <a:r>
-              <a:rPr lang="en-US" sz="1100" b="1" spc="150" kern="0" dirty="0">
-                <a:solidFill>
-                  <a:srgbClr val="00A86B"/>
-                </a:solidFill>
+              <a:rPr lang="en-US" sz="1000" spc="200" kern="0" dirty="0">
+                <a:solidFill>
+                  <a:srgbClr val="9A6A3C"/>
+                </a:solidFill>
+                <a:latin typeface="Corbel" pitchFamily="34" charset="0"/>
+                <a:ea typeface="Corbel" pitchFamily="34" charset="-122"/>
+                <a:cs typeface="Corbel" pitchFamily="34" charset="-120"/>
               </a:rPr>
               <a:t>UNIT 1  ·  WORKED EXAMPLE</a:t>
             </a:r>
-            <a:endParaRPr lang="en-US" sz="1100" dirty="0"/>
+            <a:endParaRPr lang="en-US" sz="1000" dirty="0"/>
           </a:p>
         </p:txBody>
       </p:sp>
@@ -3783,8 +3970,8 @@
         </p:nvSpPr>
         <p:spPr>
           <a:xfrm>
-            <a:off x="502920" y="548640"/>
-            <a:ext cx="8046720" cy="566928"/>
+            <a:off x="566928" y="658368"/>
+            <a:ext cx="7772400" cy="658368"/>
           </a:xfrm>
           <a:prstGeom prst="rect">
             <a:avLst/>
@@ -3797,17 +3984,23 @@
           <a:lstStyle/>
           <a:p>
             <a:pPr indent="0" marL="0">
+              <a:lnSpc>
+                <a:spcPct val="100000"/>
+              </a:lnSpc>
               <a:buNone/>
             </a:pPr>
             <a:r>
-              <a:rPr lang="en-US" sz="2300" b="1" dirty="0">
-                <a:solidFill>
-                  <a:srgbClr val="111827"/>
-                </a:solidFill>
+              <a:rPr lang="en-US" sz="2500" dirty="0">
+                <a:solidFill>
+                  <a:srgbClr val="1C3140"/>
+                </a:solidFill>
+                <a:latin typeface="Constantia" pitchFamily="34" charset="0"/>
+                <a:ea typeface="Constantia" pitchFamily="34" charset="-122"/>
+                <a:cs typeface="Constantia" pitchFamily="34" charset="-120"/>
               </a:rPr>
               <a:t>When the paradigm and the method do not match</a:t>
             </a:r>
-            <a:endParaRPr lang="en-US" sz="2300" dirty="0"/>
+            <a:endParaRPr lang="en-US" sz="2500" dirty="0"/>
           </a:p>
         </p:txBody>
       </p:sp>
@@ -3819,21 +4012,16 @@
         </p:nvSpPr>
         <p:spPr>
           <a:xfrm>
-            <a:off x="502920" y="1207008"/>
-            <a:ext cx="8138160" cy="3200400"/>
+            <a:off x="566928" y="1335024"/>
+            <a:ext cx="566928" cy="20117"/>
           </a:xfrm>
           <a:prstGeom prst="rect">
             <a:avLst/>
           </a:prstGeom>
           <a:solidFill>
-            <a:srgbClr val="F3F7FC"/>
+            <a:srgbClr val="9A6A3C"/>
           </a:solidFill>
-          <a:ln w="9525">
-            <a:solidFill>
-              <a:srgbClr val="0066CC"/>
-            </a:solidFill>
-            <a:prstDash val="solid"/>
-          </a:ln>
+          <a:ln/>
         </p:spPr>
       </p:sp>
       <p:sp>
@@ -3844,8 +4032,8 @@
         </p:nvSpPr>
         <p:spPr>
           <a:xfrm>
-            <a:off x="731520" y="1371600"/>
-            <a:ext cx="7680960" cy="1005840"/>
+            <a:off x="566928" y="1645920"/>
+            <a:ext cx="8010144" cy="822960"/>
           </a:xfrm>
           <a:prstGeom prst="rect">
             <a:avLst/>
@@ -3858,137 +4046,170 @@
           <a:lstStyle/>
           <a:p>
             <a:pPr indent="0" marL="0">
+              <a:lnSpc>
+                <a:spcPct val="124000"/>
+              </a:lnSpc>
+              <a:buNone/>
+            </a:pPr>
+            <a:r>
+              <a:rPr lang="en-US" sz="1300" i="1" dirty="0">
+                <a:solidFill>
+                  <a:srgbClr val="5F6B76"/>
+                </a:solidFill>
+                <a:latin typeface="Constantia" pitchFamily="34" charset="0"/>
+                <a:ea typeface="Constantia" pitchFamily="34" charset="-122"/>
+                <a:cs typeface="Constantia" pitchFamily="34" charset="-120"/>
+              </a:rPr>
+              <a:t>A master's student writes that she takes an interpretivist position because "reality is socially constructed". Her method section then describes a 40-item Likert questionnaire administered to 300 nurses, analysed with chi-square tests.</a:t>
+            </a:r>
+            <a:endParaRPr lang="en-US" sz="1300" dirty="0"/>
+          </a:p>
+        </p:txBody>
+      </p:sp>
+      <p:sp>
+        <p:nvSpPr>
+          <p:cNvPr id="6" name="Text 4"/>
+          <p:cNvSpPr/>
+          <p:nvPr/>
+        </p:nvSpPr>
+        <p:spPr>
+          <a:xfrm>
+            <a:off x="786384" y="2523744"/>
+            <a:ext cx="7406640" cy="1920240"/>
+          </a:xfrm>
+          <a:prstGeom prst="rect">
+            <a:avLst/>
+          </a:prstGeom>
+          <a:noFill/>
+          <a:ln/>
+        </p:spPr>
+        <p:txBody>
+          <a:bodyPr wrap="square" rtlCol="0" anchor="t"/>
+          <a:lstStyle/>
+          <a:p>
+            <a:pPr marL="342900" indent="-342900">
               <a:lnSpc>
                 <a:spcPct val="120000"/>
               </a:lnSpc>
-              <a:buNone/>
-            </a:pPr>
-            <a:r>
-              <a:rPr lang="en-US" sz="1400" i="1" dirty="0">
-                <a:solidFill>
-                  <a:srgbClr val="374151"/>
-                </a:solidFill>
-              </a:rPr>
-              <a:t>A master's student writes that she takes an interpretivist position because "reality is socially constructed". Her method section then describes a 40-item Likert questionnaire administered to 300 nurses, analysed with chi-square tests.</a:t>
-            </a:r>
-            <a:endParaRPr lang="en-US" sz="1400" dirty="0"/>
-          </a:p>
-        </p:txBody>
-      </p:sp>
-      <p:sp>
-        <p:nvSpPr>
-          <p:cNvPr id="6" name="Text 4"/>
-          <p:cNvSpPr/>
-          <p:nvPr/>
-        </p:nvSpPr>
-        <p:spPr>
-          <a:xfrm>
-            <a:off x="868680" y="2395728"/>
-            <a:ext cx="7452360" cy="1920240"/>
-          </a:xfrm>
-          <a:prstGeom prst="rect">
-            <a:avLst/>
-          </a:prstGeom>
-          <a:noFill/>
-          <a:ln/>
-        </p:spPr>
-        <p:txBody>
-          <a:bodyPr wrap="square" rtlCol="0" anchor="t"/>
-          <a:lstStyle/>
-          <a:p>
-            <a:pPr marL="342900" indent="-342900">
-              <a:lnSpc>
-                <a:spcPct val="115000"/>
-              </a:lnSpc>
+              <a:spcAft>
+                <a:spcPts val="500"/>
+              </a:spcAft>
               <a:buSzPct val="100000"/>
               <a:buFont typeface="+mj-lt"/>
               <a:buAutoNum type="arabicPeriod" startAt="1"/>
             </a:pPr>
             <a:r>
-              <a:rPr lang="en-US" sz="1300" dirty="0">
-                <a:solidFill>
-                  <a:srgbClr val="374151"/>
-                </a:solidFill>
+              <a:rPr lang="en-US" sz="1250" dirty="0">
+                <a:solidFill>
+                  <a:srgbClr val="23282E"/>
+                </a:solidFill>
+                <a:latin typeface="Corbel" pitchFamily="34" charset="0"/>
+                <a:ea typeface="Corbel" pitchFamily="34" charset="-122"/>
+                <a:cs typeface="Corbel" pitchFamily="34" charset="-120"/>
               </a:rPr>
               <a:t>Interpretivism treats meaning as constructed and context-specific, so it points towards interviews or observation.</a:t>
             </a:r>
-            <a:endParaRPr lang="en-US" sz="1300" dirty="0"/>
+            <a:endParaRPr lang="en-US" sz="1250" dirty="0"/>
           </a:p>
           <a:p>
             <a:pPr marL="342900" indent="-342900">
               <a:lnSpc>
-                <a:spcPct val="115000"/>
+                <a:spcPct val="120000"/>
               </a:lnSpc>
+              <a:spcAft>
+                <a:spcPts val="500"/>
+              </a:spcAft>
               <a:buSzPct val="100000"/>
               <a:buFont typeface="+mj-lt"/>
               <a:buAutoNum type="arabicPeriod" startAt="1"/>
             </a:pPr>
             <a:r>
-              <a:rPr lang="en-US" sz="1300" dirty="0">
-                <a:solidFill>
-                  <a:srgbClr val="374151"/>
-                </a:solidFill>
+              <a:rPr lang="en-US" sz="1250" dirty="0">
+                <a:solidFill>
+                  <a:srgbClr val="23282E"/>
+                </a:solidFill>
+                <a:latin typeface="Corbel" pitchFamily="34" charset="0"/>
+                <a:ea typeface="Corbel" pitchFamily="34" charset="-122"/>
+                <a:cs typeface="Corbel" pitchFamily="34" charset="-120"/>
               </a:rPr>
               <a:t>A fixed-response questionnaire assumes the researcher already knows the categories that matter — a positivist assumption.</a:t>
             </a:r>
-            <a:endParaRPr lang="en-US" sz="1300" dirty="0"/>
+            <a:endParaRPr lang="en-US" sz="1250" dirty="0"/>
           </a:p>
           <a:p>
             <a:pPr marL="342900" indent="-342900">
               <a:lnSpc>
-                <a:spcPct val="115000"/>
+                <a:spcPct val="120000"/>
               </a:lnSpc>
+              <a:spcAft>
+                <a:spcPts val="500"/>
+              </a:spcAft>
               <a:buSzPct val="100000"/>
               <a:buFont typeface="+mj-lt"/>
               <a:buAutoNum type="arabicPeriod" startAt="1"/>
             </a:pPr>
             <a:r>
-              <a:rPr lang="en-US" sz="1300" dirty="0">
-                <a:solidFill>
-                  <a:srgbClr val="374151"/>
-                </a:solidFill>
+              <a:rPr lang="en-US" sz="1250" dirty="0">
+                <a:solidFill>
+                  <a:srgbClr val="23282E"/>
+                </a:solidFill>
+                <a:latin typeface="Corbel" pitchFamily="34" charset="0"/>
+                <a:ea typeface="Corbel" pitchFamily="34" charset="-122"/>
+                <a:cs typeface="Corbel" pitchFamily="34" charset="-120"/>
               </a:rPr>
               <a:t>Neither choice is wrong on its own. The problem is that they contradict each other in one study.</a:t>
             </a:r>
-            <a:endParaRPr lang="en-US" sz="1300" dirty="0"/>
+            <a:endParaRPr lang="en-US" sz="1250" dirty="0"/>
           </a:p>
           <a:p>
             <a:pPr marL="342900" indent="-342900">
               <a:lnSpc>
-                <a:spcPct val="115000"/>
+                <a:spcPct val="120000"/>
               </a:lnSpc>
+              <a:spcAft>
+                <a:spcPts val="500"/>
+              </a:spcAft>
               <a:buSzPct val="100000"/>
               <a:buFont typeface="+mj-lt"/>
               <a:buAutoNum type="arabicPeriod" startAt="1"/>
             </a:pPr>
             <a:r>
-              <a:rPr lang="en-US" sz="1300" dirty="0">
-                <a:solidFill>
-                  <a:srgbClr val="374151"/>
-                </a:solidFill>
+              <a:rPr lang="en-US" sz="1250" dirty="0">
+                <a:solidFill>
+                  <a:srgbClr val="23282E"/>
+                </a:solidFill>
+                <a:latin typeface="Corbel" pitchFamily="34" charset="0"/>
+                <a:ea typeface="Corbel" pitchFamily="34" charset="-122"/>
+                <a:cs typeface="Corbel" pitchFamily="34" charset="-120"/>
               </a:rPr>
               <a:t>Two honest fixes: keep the survey and state a post-positivist position, or keep interpretivism and switch to interviews.</a:t>
             </a:r>
-            <a:endParaRPr lang="en-US" sz="1300" dirty="0"/>
+            <a:endParaRPr lang="en-US" sz="1250" dirty="0"/>
           </a:p>
           <a:p>
             <a:pPr marL="342900" indent="-342900">
               <a:lnSpc>
-                <a:spcPct val="115000"/>
+                <a:spcPct val="120000"/>
               </a:lnSpc>
+              <a:spcAft>
+                <a:spcPts val="500"/>
+              </a:spcAft>
               <a:buSzPct val="100000"/>
               <a:buFont typeface="+mj-lt"/>
               <a:buAutoNum type="arabicPeriod" startAt="1"/>
             </a:pPr>
             <a:r>
-              <a:rPr lang="en-US" sz="1300" dirty="0">
-                <a:solidFill>
-                  <a:srgbClr val="374151"/>
-                </a:solidFill>
+              <a:rPr lang="en-US" sz="1250" dirty="0">
+                <a:solidFill>
+                  <a:srgbClr val="23282E"/>
+                </a:solidFill>
+                <a:latin typeface="Corbel" pitchFamily="34" charset="0"/>
+                <a:ea typeface="Corbel" pitchFamily="34" charset="-122"/>
+                <a:cs typeface="Corbel" pitchFamily="34" charset="-120"/>
               </a:rPr>
               <a:t>A third option is a genuine mixed methods design, but then the integration has to be planned, not implied.</a:t>
             </a:r>
-            <a:endParaRPr lang="en-US" sz="1300" dirty="0"/>
+            <a:endParaRPr lang="en-US" sz="1250" dirty="0"/>
           </a:p>
         </p:txBody>
       </p:sp>
@@ -4004,8 +4225,8 @@
         </p:nvSpPr>
         <p:spPr>
           <a:xfrm>
-            <a:off x="8503920" y="4709160"/>
-            <a:ext cx="800000" cy="300000"/>
+            <a:off x="566928" y="4700016"/>
+            <a:ext cx="914400" cy="274320"/>
           </a:xfrm>
           <a:prstGeom prst="rect">
             <a:avLst/>
@@ -4020,10 +4241,13 @@
           <a:bodyPr/>
           <a:lstStyle>
             <a:lvl1pPr>
-              <a:defRPr sz="1000">
-                <a:solidFill>
-                  <a:srgbClr val="6B7280"/>
-                </a:solidFill>
+              <a:defRPr sz="900">
+                <a:solidFill>
+                  <a:srgbClr val="5F6B76"/>
+                </a:solidFill>
+                <a:latin typeface="Corbel"/>
+                <a:ea typeface="Corbel"/>
+                <a:cs typeface="Corbel"/>
               </a:defRPr>
             </a:lvl1pPr>
           </a:lstStyle>
@@ -4070,8 +4294,8 @@
         </p:nvSpPr>
         <p:spPr>
           <a:xfrm>
-            <a:off x="502920" y="292608"/>
-            <a:ext cx="8046720" cy="228600"/>
+            <a:off x="566928" y="384048"/>
+            <a:ext cx="7772400" cy="237744"/>
           </a:xfrm>
           <a:prstGeom prst="rect">
             <a:avLst/>
@@ -4087,14 +4311,17 @@
               <a:buNone/>
             </a:pPr>
             <a:r>
-              <a:rPr lang="en-US" sz="1100" b="1" spc="150" kern="0" dirty="0">
-                <a:solidFill>
-                  <a:srgbClr val="0066CC"/>
-                </a:solidFill>
+              <a:rPr lang="en-US" sz="1000" spc="200" kern="0" dirty="0">
+                <a:solidFill>
+                  <a:srgbClr val="9A6A3C"/>
+                </a:solidFill>
+                <a:latin typeface="Corbel" pitchFamily="34" charset="0"/>
+                <a:ea typeface="Corbel" pitchFamily="34" charset="-122"/>
+                <a:cs typeface="Corbel" pitchFamily="34" charset="-120"/>
               </a:rPr>
               <a:t>UNIT 1</a:t>
             </a:r>
-            <a:endParaRPr lang="en-US" sz="1100" dirty="0"/>
+            <a:endParaRPr lang="en-US" sz="1000" dirty="0"/>
           </a:p>
         </p:txBody>
       </p:sp>
@@ -4106,8 +4333,8 @@
         </p:nvSpPr>
         <p:spPr>
           <a:xfrm>
-            <a:off x="502920" y="548640"/>
-            <a:ext cx="8046720" cy="640080"/>
+            <a:off x="566928" y="658368"/>
+            <a:ext cx="7772400" cy="658368"/>
           </a:xfrm>
           <a:prstGeom prst="rect">
             <a:avLst/>
@@ -4120,30 +4347,56 @@
           <a:lstStyle/>
           <a:p>
             <a:pPr indent="0" marL="0">
+              <a:lnSpc>
+                <a:spcPct val="100000"/>
+              </a:lnSpc>
               <a:buNone/>
             </a:pPr>
             <a:r>
-              <a:rPr lang="en-US" sz="2400" b="1" dirty="0">
-                <a:solidFill>
-                  <a:srgbClr val="111827"/>
-                </a:solidFill>
+              <a:rPr lang="en-US" sz="2500" dirty="0">
+                <a:solidFill>
+                  <a:srgbClr val="1C3140"/>
+                </a:solidFill>
+                <a:latin typeface="Constantia" pitchFamily="34" charset="0"/>
+                <a:ea typeface="Constantia" pitchFamily="34" charset="-122"/>
+                <a:cs typeface="Constantia" pitchFamily="34" charset="-120"/>
               </a:rPr>
               <a:t>Key terms (1/2)</a:t>
             </a:r>
-            <a:endParaRPr lang="en-US" sz="2400" dirty="0"/>
-          </a:p>
-        </p:txBody>
-      </p:sp>
-      <p:sp>
-        <p:nvSpPr>
-          <p:cNvPr id="4" name="Text 2"/>
+            <a:endParaRPr lang="en-US" sz="2500" dirty="0"/>
+          </a:p>
+        </p:txBody>
+      </p:sp>
+      <p:sp>
+        <p:nvSpPr>
+          <p:cNvPr id="4" name="Shape 2"/>
           <p:cNvSpPr/>
           <p:nvPr/>
         </p:nvSpPr>
         <p:spPr>
           <a:xfrm>
-            <a:off x="685800" y="1325880"/>
-            <a:ext cx="7772400" cy="3200400"/>
+            <a:off x="566928" y="1335024"/>
+            <a:ext cx="566928" cy="20117"/>
+          </a:xfrm>
+          <a:prstGeom prst="rect">
+            <a:avLst/>
+          </a:prstGeom>
+          <a:solidFill>
+            <a:srgbClr val="9A6A3C"/>
+          </a:solidFill>
+          <a:ln/>
+        </p:spPr>
+      </p:sp>
+      <p:sp>
+        <p:nvSpPr>
+          <p:cNvPr id="5" name="Text 3"/>
+          <p:cNvSpPr/>
+          <p:nvPr/>
+        </p:nvSpPr>
+        <p:spPr>
+          <a:xfrm>
+            <a:off x="713232" y="1664208"/>
+            <a:ext cx="7498080" cy="2788920"/>
           </a:xfrm>
           <a:prstGeom prst="rect">
             <a:avLst/>
@@ -4157,19 +4410,22 @@
           <a:p>
             <a:pPr marL="342900" indent="-342900">
               <a:lnSpc>
-                <a:spcPct val="125000"/>
+                <a:spcPct val="130000"/>
               </a:lnSpc>
               <a:spcAft>
-                <a:spcPts val="800"/>
+                <a:spcPts val="1100"/>
               </a:spcAft>
               <a:buSzPct val="100000"/>
-              <a:buChar char="•"/>
+              <a:buChar char="–"/>
             </a:pPr>
             <a:r>
               <a:rPr lang="en-US" sz="1500" dirty="0">
                 <a:solidFill>
-                  <a:srgbClr val="374151"/>
-                </a:solidFill>
+                  <a:srgbClr val="23282E"/>
+                </a:solidFill>
+                <a:latin typeface="Corbel" pitchFamily="34" charset="0"/>
+                <a:ea typeface="Corbel" pitchFamily="34" charset="-122"/>
+                <a:cs typeface="Corbel" pitchFamily="34" charset="-120"/>
               </a:rPr>
               <a:t>Paradigm — A set of shared assumptions about the nature of reality and how it can be known, which shapes what counts as legitimate evidence.</a:t>
             </a:r>
@@ -4178,19 +4434,22 @@
           <a:p>
             <a:pPr marL="342900" indent="-342900">
               <a:lnSpc>
-                <a:spcPct val="125000"/>
+                <a:spcPct val="130000"/>
               </a:lnSpc>
               <a:spcAft>
-                <a:spcPts val="800"/>
+                <a:spcPts val="1100"/>
               </a:spcAft>
               <a:buSzPct val="100000"/>
-              <a:buChar char="•"/>
+              <a:buChar char="–"/>
             </a:pPr>
             <a:r>
               <a:rPr lang="en-US" sz="1500" dirty="0">
                 <a:solidFill>
-                  <a:srgbClr val="374151"/>
-                </a:solidFill>
+                  <a:srgbClr val="23282E"/>
+                </a:solidFill>
+                <a:latin typeface="Corbel" pitchFamily="34" charset="0"/>
+                <a:ea typeface="Corbel" pitchFamily="34" charset="-122"/>
+                <a:cs typeface="Corbel" pitchFamily="34" charset="-120"/>
               </a:rPr>
               <a:t>Ontology — Assumptions about the nature of reality — whether it is single and objective, or multiple and constructed.</a:t>
             </a:r>
@@ -4199,19 +4458,22 @@
           <a:p>
             <a:pPr marL="342900" indent="-342900">
               <a:lnSpc>
-                <a:spcPct val="125000"/>
+                <a:spcPct val="130000"/>
               </a:lnSpc>
               <a:spcAft>
-                <a:spcPts val="800"/>
+                <a:spcPts val="1100"/>
               </a:spcAft>
               <a:buSzPct val="100000"/>
-              <a:buChar char="•"/>
+              <a:buChar char="–"/>
             </a:pPr>
             <a:r>
               <a:rPr lang="en-US" sz="1500" dirty="0">
                 <a:solidFill>
-                  <a:srgbClr val="374151"/>
-                </a:solidFill>
+                  <a:srgbClr val="23282E"/>
+                </a:solidFill>
+                <a:latin typeface="Corbel" pitchFamily="34" charset="0"/>
+                <a:ea typeface="Corbel" pitchFamily="34" charset="-122"/>
+                <a:cs typeface="Corbel" pitchFamily="34" charset="-120"/>
               </a:rPr>
               <a:t>Epistemology — Assumptions about what knowledge is and how it can legitimately be acquired.</a:t>
             </a:r>
@@ -4220,19 +4482,22 @@
           <a:p>
             <a:pPr marL="342900" indent="-342900">
               <a:lnSpc>
-                <a:spcPct val="125000"/>
+                <a:spcPct val="130000"/>
               </a:lnSpc>
               <a:spcAft>
-                <a:spcPts val="800"/>
+                <a:spcPts val="1100"/>
               </a:spcAft>
               <a:buSzPct val="100000"/>
-              <a:buChar char="•"/>
+              <a:buChar char="–"/>
             </a:pPr>
             <a:r>
               <a:rPr lang="en-US" sz="1500" dirty="0">
                 <a:solidFill>
-                  <a:srgbClr val="374151"/>
-                </a:solidFill>
+                  <a:srgbClr val="23282E"/>
+                </a:solidFill>
+                <a:latin typeface="Corbel" pitchFamily="34" charset="0"/>
+                <a:ea typeface="Corbel" pitchFamily="34" charset="-122"/>
+                <a:cs typeface="Corbel" pitchFamily="34" charset="-120"/>
               </a:rPr>
               <a:t>Basic research — Research undertaken to extend understanding, without a specific application in view.</a:t>
             </a:r>
@@ -4252,8 +4517,8 @@
         </p:nvSpPr>
         <p:spPr>
           <a:xfrm>
-            <a:off x="8503920" y="4709160"/>
-            <a:ext cx="800000" cy="300000"/>
+            <a:off x="566928" y="4700016"/>
+            <a:ext cx="914400" cy="274320"/>
           </a:xfrm>
           <a:prstGeom prst="rect">
             <a:avLst/>
@@ -4268,10 +4533,13 @@
           <a:bodyPr/>
           <a:lstStyle>
             <a:lvl1pPr>
-              <a:defRPr sz="1000">
-                <a:solidFill>
-                  <a:srgbClr val="6B7280"/>
-                </a:solidFill>
+              <a:defRPr sz="900">
+                <a:solidFill>
+                  <a:srgbClr val="5F6B76"/>
+                </a:solidFill>
+                <a:latin typeface="Corbel"/>
+                <a:ea typeface="Corbel"/>
+                <a:cs typeface="Corbel"/>
               </a:defRPr>
             </a:lvl1pPr>
           </a:lstStyle>
@@ -4318,8 +4586,8 @@
         </p:nvSpPr>
         <p:spPr>
           <a:xfrm>
-            <a:off x="502920" y="292608"/>
-            <a:ext cx="8046720" cy="228600"/>
+            <a:off x="566928" y="384048"/>
+            <a:ext cx="7772400" cy="237744"/>
           </a:xfrm>
           <a:prstGeom prst="rect">
             <a:avLst/>
@@ -4335,14 +4603,17 @@
               <a:buNone/>
             </a:pPr>
             <a:r>
-              <a:rPr lang="en-US" sz="1100" b="1" spc="150" kern="0" dirty="0">
-                <a:solidFill>
-                  <a:srgbClr val="0066CC"/>
-                </a:solidFill>
+              <a:rPr lang="en-US" sz="1000" spc="200" kern="0" dirty="0">
+                <a:solidFill>
+                  <a:srgbClr val="9A6A3C"/>
+                </a:solidFill>
+                <a:latin typeface="Corbel" pitchFamily="34" charset="0"/>
+                <a:ea typeface="Corbel" pitchFamily="34" charset="-122"/>
+                <a:cs typeface="Corbel" pitchFamily="34" charset="-120"/>
               </a:rPr>
               <a:t>UNIT 1</a:t>
             </a:r>
-            <a:endParaRPr lang="en-US" sz="1100" dirty="0"/>
+            <a:endParaRPr lang="en-US" sz="1000" dirty="0"/>
           </a:p>
         </p:txBody>
       </p:sp>
@@ -4354,8 +4625,8 @@
         </p:nvSpPr>
         <p:spPr>
           <a:xfrm>
-            <a:off x="502920" y="548640"/>
-            <a:ext cx="8046720" cy="640080"/>
+            <a:off x="566928" y="658368"/>
+            <a:ext cx="7772400" cy="658368"/>
           </a:xfrm>
           <a:prstGeom prst="rect">
             <a:avLst/>
@@ -4368,30 +4639,56 @@
           <a:lstStyle/>
           <a:p>
             <a:pPr indent="0" marL="0">
+              <a:lnSpc>
+                <a:spcPct val="100000"/>
+              </a:lnSpc>
               <a:buNone/>
             </a:pPr>
             <a:r>
-              <a:rPr lang="en-US" sz="2400" b="1" dirty="0">
-                <a:solidFill>
-                  <a:srgbClr val="111827"/>
-                </a:solidFill>
+              <a:rPr lang="en-US" sz="2500" dirty="0">
+                <a:solidFill>
+                  <a:srgbClr val="1C3140"/>
+                </a:solidFill>
+                <a:latin typeface="Constantia" pitchFamily="34" charset="0"/>
+                <a:ea typeface="Constantia" pitchFamily="34" charset="-122"/>
+                <a:cs typeface="Constantia" pitchFamily="34" charset="-120"/>
               </a:rPr>
               <a:t>Key terms (2/2)</a:t>
             </a:r>
-            <a:endParaRPr lang="en-US" sz="2400" dirty="0"/>
-          </a:p>
-        </p:txBody>
-      </p:sp>
-      <p:sp>
-        <p:nvSpPr>
-          <p:cNvPr id="4" name="Text 2"/>
+            <a:endParaRPr lang="en-US" sz="2500" dirty="0"/>
+          </a:p>
+        </p:txBody>
+      </p:sp>
+      <p:sp>
+        <p:nvSpPr>
+          <p:cNvPr id="4" name="Shape 2"/>
           <p:cNvSpPr/>
           <p:nvPr/>
         </p:nvSpPr>
         <p:spPr>
           <a:xfrm>
-            <a:off x="685800" y="1325880"/>
-            <a:ext cx="7772400" cy="3200400"/>
+            <a:off x="566928" y="1335024"/>
+            <a:ext cx="566928" cy="20117"/>
+          </a:xfrm>
+          <a:prstGeom prst="rect">
+            <a:avLst/>
+          </a:prstGeom>
+          <a:solidFill>
+            <a:srgbClr val="9A6A3C"/>
+          </a:solidFill>
+          <a:ln/>
+        </p:spPr>
+      </p:sp>
+      <p:sp>
+        <p:nvSpPr>
+          <p:cNvPr id="5" name="Text 3"/>
+          <p:cNvSpPr/>
+          <p:nvPr/>
+        </p:nvSpPr>
+        <p:spPr>
+          <a:xfrm>
+            <a:off x="713232" y="1664208"/>
+            <a:ext cx="7498080" cy="2788920"/>
           </a:xfrm>
           <a:prstGeom prst="rect">
             <a:avLst/>
@@ -4405,19 +4702,22 @@
           <a:p>
             <a:pPr marL="342900" indent="-342900">
               <a:lnSpc>
-                <a:spcPct val="125000"/>
+                <a:spcPct val="130000"/>
               </a:lnSpc>
               <a:spcAft>
-                <a:spcPts val="800"/>
+                <a:spcPts val="1100"/>
               </a:spcAft>
               <a:buSzPct val="100000"/>
-              <a:buChar char="•"/>
+              <a:buChar char="–"/>
             </a:pPr>
             <a:r>
               <a:rPr lang="en-US" sz="1500" dirty="0">
                 <a:solidFill>
-                  <a:srgbClr val="374151"/>
-                </a:solidFill>
+                  <a:srgbClr val="23282E"/>
+                </a:solidFill>
+                <a:latin typeface="Corbel" pitchFamily="34" charset="0"/>
+                <a:ea typeface="Corbel" pitchFamily="34" charset="-122"/>
+                <a:cs typeface="Corbel" pitchFamily="34" charset="-120"/>
               </a:rPr>
               <a:t>Applied research — Research directed at solving an identified practical problem.</a:t>
             </a:r>
@@ -4426,19 +4726,22 @@
           <a:p>
             <a:pPr marL="342900" indent="-342900">
               <a:lnSpc>
-                <a:spcPct val="125000"/>
+                <a:spcPct val="130000"/>
               </a:lnSpc>
               <a:spcAft>
-                <a:spcPts val="800"/>
+                <a:spcPts val="1100"/>
               </a:spcAft>
               <a:buSzPct val="100000"/>
-              <a:buChar char="•"/>
+              <a:buChar char="–"/>
             </a:pPr>
             <a:r>
               <a:rPr lang="en-US" sz="1500" dirty="0">
                 <a:solidFill>
-                  <a:srgbClr val="374151"/>
-                </a:solidFill>
+                  <a:srgbClr val="23282E"/>
+                </a:solidFill>
+                <a:latin typeface="Corbel" pitchFamily="34" charset="0"/>
+                <a:ea typeface="Corbel" pitchFamily="34" charset="-122"/>
+                <a:cs typeface="Corbel" pitchFamily="34" charset="-120"/>
               </a:rPr>
               <a:t>Reproducibility — The property that another researcher, following the reported method with the same data, obtains the same result.</a:t>
             </a:r>
@@ -4458,8 +4761,8 @@
         </p:nvSpPr>
         <p:spPr>
           <a:xfrm>
-            <a:off x="8503920" y="4709160"/>
-            <a:ext cx="800000" cy="300000"/>
+            <a:off x="566928" y="4700016"/>
+            <a:ext cx="914400" cy="274320"/>
           </a:xfrm>
           <a:prstGeom prst="rect">
             <a:avLst/>
@@ -4474,10 +4777,13 @@
           <a:bodyPr/>
           <a:lstStyle>
             <a:lvl1pPr>
-              <a:defRPr sz="1000">
-                <a:solidFill>
-                  <a:srgbClr val="6B7280"/>
-                </a:solidFill>
+              <a:defRPr sz="900">
+                <a:solidFill>
+                  <a:srgbClr val="5F6B76"/>
+                </a:solidFill>
+                <a:latin typeface="Corbel"/>
+                <a:ea typeface="Corbel"/>
+                <a:cs typeface="Corbel"/>
               </a:defRPr>
             </a:lvl1pPr>
           </a:lstStyle>
@@ -4524,8 +4830,8 @@
         </p:nvSpPr>
         <p:spPr>
           <a:xfrm>
-            <a:off x="502920" y="292608"/>
-            <a:ext cx="8046720" cy="228600"/>
+            <a:off x="685800" y="1024128"/>
+            <a:ext cx="6766560" cy="292608"/>
           </a:xfrm>
           <a:prstGeom prst="rect">
             <a:avLst/>
@@ -4541,14 +4847,17 @@
               <a:buNone/>
             </a:pPr>
             <a:r>
-              <a:rPr lang="en-US" sz="1100" b="1" spc="150" kern="0" dirty="0">
-                <a:solidFill>
-                  <a:srgbClr val="0066CC"/>
-                </a:solidFill>
-              </a:rPr>
-              <a:t>UNIT 1  ·  OVER TO YOU</a:t>
-            </a:r>
-            <a:endParaRPr lang="en-US" sz="1100" dirty="0"/>
+              <a:rPr lang="en-US" sz="1150" spc="240" kern="0" dirty="0">
+                <a:solidFill>
+                  <a:srgbClr val="C8A67B"/>
+                </a:solidFill>
+                <a:latin typeface="Corbel" pitchFamily="34" charset="0"/>
+                <a:ea typeface="Corbel" pitchFamily="34" charset="-122"/>
+                <a:cs typeface="Corbel" pitchFamily="34" charset="-120"/>
+              </a:rPr>
+              <a:t>Over to you</a:t>
+            </a:r>
+            <a:endParaRPr lang="en-US" sz="1150" dirty="0"/>
           </a:p>
         </p:txBody>
       </p:sp>
@@ -4560,8 +4869,8 @@
         </p:nvSpPr>
         <p:spPr>
           <a:xfrm>
-            <a:off x="502920" y="548640"/>
-            <a:ext cx="8046720" cy="640080"/>
+            <a:off x="685800" y="1700784"/>
+            <a:ext cx="6858000" cy="640080"/>
           </a:xfrm>
           <a:prstGeom prst="rect">
             <a:avLst/>
@@ -4577,14 +4886,17 @@
               <a:buNone/>
             </a:pPr>
             <a:r>
-              <a:rPr lang="en-US" sz="2400" b="1" dirty="0">
-                <a:solidFill>
-                  <a:srgbClr val="111827"/>
-                </a:solidFill>
+              <a:rPr lang="en-US" sz="3000" dirty="0">
+                <a:solidFill>
+                  <a:srgbClr val="FFFFFF"/>
+                </a:solidFill>
+                <a:latin typeface="Constantia" pitchFamily="34" charset="0"/>
+                <a:ea typeface="Constantia" pitchFamily="34" charset="-122"/>
+                <a:cs typeface="Constantia" pitchFamily="34" charset="-120"/>
               </a:rPr>
               <a:t>Activity</a:t>
             </a:r>
-            <a:endParaRPr lang="en-US" sz="2400" dirty="0"/>
+            <a:endParaRPr lang="en-US" sz="3000" dirty="0"/>
           </a:p>
         </p:txBody>
       </p:sp>
@@ -4596,8 +4908,8 @@
         </p:nvSpPr>
         <p:spPr>
           <a:xfrm>
-            <a:off x="685800" y="1325880"/>
-            <a:ext cx="7772400" cy="3200400"/>
+            <a:off x="685800" y="2487168"/>
+            <a:ext cx="6949440" cy="1737360"/>
           </a:xfrm>
           <a:prstGeom prst="rect">
             <a:avLst/>
@@ -4609,70 +4921,24 @@
           <a:bodyPr wrap="square" rtlCol="0" anchor="t"/>
           <a:lstStyle/>
           <a:p>
-            <a:pPr marL="342900" indent="-342900">
+            <a:pPr indent="0" marL="0">
               <a:lnSpc>
-                <a:spcPct val="125000"/>
+                <a:spcPct val="134000"/>
               </a:lnSpc>
-              <a:spcAft>
-                <a:spcPts val="800"/>
-              </a:spcAft>
-              <a:buSzPct val="100000"/>
-              <a:buChar char="•"/>
-            </a:pPr>
-            <a:r>
-              <a:rPr lang="en-US" sz="1300" dirty="0">
-                <a:solidFill>
-                  <a:srgbClr val="374151"/>
-                </a:solidFill>
+              <a:buNone/>
+            </a:pPr>
+            <a:r>
+              <a:rPr lang="en-US" sz="1450" dirty="0">
+                <a:solidFill>
+                  <a:srgbClr val="C4CCD4"/>
+                </a:solidFill>
+                <a:latin typeface="Corbel" pitchFamily="34" charset="0"/>
+                <a:ea typeface="Corbel" pitchFamily="34" charset="-122"/>
+                <a:cs typeface="Corbel" pitchFamily="34" charset="-120"/>
               </a:rPr>
               <a:t>In pairs, take a recent paper from your own field. Identify its purpose, approach, time dimension and implied paradigm. Then argue whether the design actually matches the paradigm the authors claim.</a:t>
             </a:r>
-            <a:endParaRPr lang="en-US" sz="1300" dirty="0"/>
-          </a:p>
-        </p:txBody>
-      </p:sp>
-      <p:sp>
-        <p:nvSpPr>
-          <p:cNvPr id="25" name="Slide Number Placeholder 0"/>
-          <p:cNvSpPr>
-            <a:spLocks noGrp="1"/>
-          </p:cNvSpPr>
-          <p:nvPr>
-            <p:ph type="sldNum" sz="quarter" idx="4294967295"/>
-          </p:nvPr>
-        </p:nvSpPr>
-        <p:spPr>
-          <a:xfrm>
-            <a:off x="8503920" y="4709160"/>
-            <a:ext cx="800000" cy="300000"/>
-          </a:xfrm>
-          <a:prstGeom prst="rect">
-            <a:avLst/>
-          </a:prstGeom>
-          <a:extLst>
-            <a:ext uri="{C572A759-6A51-4108-AA02-DFA0A04FC94B}">
-              <ma14:wrappingTextBoxFlag xmlns:ma14="http://schemas.microsoft.com/office/mac/drawingml/2011/main" val="0"/>
-            </a:ext>
-          </a:extLst>
-        </p:spPr>
-        <p:txBody>
-          <a:bodyPr/>
-          <a:lstStyle>
-            <a:lvl1pPr>
-              <a:defRPr sz="1000">
-                <a:solidFill>
-                  <a:srgbClr val="6B7280"/>
-                </a:solidFill>
-              </a:defRPr>
-            </a:lvl1pPr>
-          </a:lstStyle>
-          <a:p>
-            <a:pPr algn="l"/>
-            <a:fld id="{F7021451-1387-4CA6-816F-3879F97B5CBC}" type="slidenum">
-              <a:rPr b="0" lang="en-US"/>
-              <a:t>17</a:t>
-            </a:fld>
-            <a:endParaRPr lang="en-US"/>
+            <a:endParaRPr lang="en-US" sz="1450" dirty="0"/>
           </a:p>
         </p:txBody>
       </p:sp>
@@ -4709,8 +4975,8 @@
         </p:nvSpPr>
         <p:spPr>
           <a:xfrm>
-            <a:off x="502920" y="292608"/>
-            <a:ext cx="8046720" cy="228600"/>
+            <a:off x="566928" y="384048"/>
+            <a:ext cx="7772400" cy="237744"/>
           </a:xfrm>
           <a:prstGeom prst="rect">
             <a:avLst/>
@@ -4726,14 +4992,17 @@
               <a:buNone/>
             </a:pPr>
             <a:r>
-              <a:rPr lang="en-US" sz="1100" b="1" spc="150" kern="0" dirty="0">
-                <a:solidFill>
-                  <a:srgbClr val="0066CC"/>
-                </a:solidFill>
+              <a:rPr lang="en-US" sz="1000" spc="200" kern="0" dirty="0">
+                <a:solidFill>
+                  <a:srgbClr val="9A6A3C"/>
+                </a:solidFill>
+                <a:latin typeface="Corbel" pitchFamily="34" charset="0"/>
+                <a:ea typeface="Corbel" pitchFamily="34" charset="-122"/>
+                <a:cs typeface="Corbel" pitchFamily="34" charset="-120"/>
               </a:rPr>
               <a:t>UNIT 1</a:t>
             </a:r>
-            <a:endParaRPr lang="en-US" sz="1100" dirty="0"/>
+            <a:endParaRPr lang="en-US" sz="1000" dirty="0"/>
           </a:p>
         </p:txBody>
       </p:sp>
@@ -4745,8 +5014,8 @@
         </p:nvSpPr>
         <p:spPr>
           <a:xfrm>
-            <a:off x="502920" y="548640"/>
-            <a:ext cx="8046720" cy="640080"/>
+            <a:off x="566928" y="658368"/>
+            <a:ext cx="7772400" cy="658368"/>
           </a:xfrm>
           <a:prstGeom prst="rect">
             <a:avLst/>
@@ -4759,30 +5028,56 @@
           <a:lstStyle/>
           <a:p>
             <a:pPr indent="0" marL="0">
+              <a:lnSpc>
+                <a:spcPct val="100000"/>
+              </a:lnSpc>
               <a:buNone/>
             </a:pPr>
             <a:r>
-              <a:rPr lang="en-US" sz="2400" b="1" dirty="0">
-                <a:solidFill>
-                  <a:srgbClr val="111827"/>
-                </a:solidFill>
+              <a:rPr lang="en-US" sz="2500" dirty="0">
+                <a:solidFill>
+                  <a:srgbClr val="1C3140"/>
+                </a:solidFill>
+                <a:latin typeface="Constantia" pitchFamily="34" charset="0"/>
+                <a:ea typeface="Constantia" pitchFamily="34" charset="-122"/>
+                <a:cs typeface="Constantia" pitchFamily="34" charset="-120"/>
               </a:rPr>
               <a:t>What you will be able to do</a:t>
             </a:r>
-            <a:endParaRPr lang="en-US" sz="2400" dirty="0"/>
-          </a:p>
-        </p:txBody>
-      </p:sp>
-      <p:sp>
-        <p:nvSpPr>
-          <p:cNvPr id="4" name="Text 2"/>
+            <a:endParaRPr lang="en-US" sz="2500" dirty="0"/>
+          </a:p>
+        </p:txBody>
+      </p:sp>
+      <p:sp>
+        <p:nvSpPr>
+          <p:cNvPr id="4" name="Shape 2"/>
           <p:cNvSpPr/>
           <p:nvPr/>
         </p:nvSpPr>
         <p:spPr>
           <a:xfrm>
-            <a:off x="685800" y="1325880"/>
-            <a:ext cx="7772400" cy="3200400"/>
+            <a:off x="566928" y="1335024"/>
+            <a:ext cx="566928" cy="20117"/>
+          </a:xfrm>
+          <a:prstGeom prst="rect">
+            <a:avLst/>
+          </a:prstGeom>
+          <a:solidFill>
+            <a:srgbClr val="9A6A3C"/>
+          </a:solidFill>
+          <a:ln/>
+        </p:spPr>
+      </p:sp>
+      <p:sp>
+        <p:nvSpPr>
+          <p:cNvPr id="5" name="Text 3"/>
+          <p:cNvSpPr/>
+          <p:nvPr/>
+        </p:nvSpPr>
+        <p:spPr>
+          <a:xfrm>
+            <a:off x="713232" y="1664208"/>
+            <a:ext cx="7498080" cy="2788920"/>
           </a:xfrm>
           <a:prstGeom prst="rect">
             <a:avLst/>
@@ -4796,107 +5091,122 @@
           <a:p>
             <a:pPr marL="342900" indent="-342900">
               <a:lnSpc>
-                <a:spcPct val="125000"/>
+                <a:spcPct val="130000"/>
               </a:lnSpc>
               <a:spcAft>
-                <a:spcPts val="800"/>
+                <a:spcPts val="1100"/>
               </a:spcAft>
               <a:buSzPct val="100000"/>
-              <a:buChar char="•"/>
-            </a:pPr>
-            <a:r>
-              <a:rPr lang="en-US" sz="1700" dirty="0">
-                <a:solidFill>
-                  <a:srgbClr val="374151"/>
-                </a:solidFill>
+              <a:buChar char="–"/>
+            </a:pPr>
+            <a:r>
+              <a:rPr lang="en-US" sz="1650" dirty="0">
+                <a:solidFill>
+                  <a:srgbClr val="23282E"/>
+                </a:solidFill>
+                <a:latin typeface="Corbel" pitchFamily="34" charset="0"/>
+                <a:ea typeface="Corbel" pitchFamily="34" charset="-122"/>
+                <a:cs typeface="Corbel" pitchFamily="34" charset="-120"/>
               </a:rPr>
               <a:t>Define research and distinguish it from opinion, audit and routine reporting</a:t>
             </a:r>
-            <a:endParaRPr lang="en-US" sz="1700" dirty="0"/>
+            <a:endParaRPr lang="en-US" sz="1650" dirty="0"/>
           </a:p>
           <a:p>
             <a:pPr marL="342900" indent="-342900">
               <a:lnSpc>
-                <a:spcPct val="125000"/>
+                <a:spcPct val="130000"/>
               </a:lnSpc>
               <a:spcAft>
-                <a:spcPts val="800"/>
+                <a:spcPts val="1100"/>
               </a:spcAft>
               <a:buSzPct val="100000"/>
-              <a:buChar char="•"/>
-            </a:pPr>
-            <a:r>
-              <a:rPr lang="en-US" sz="1700" dirty="0">
-                <a:solidFill>
-                  <a:srgbClr val="374151"/>
-                </a:solidFill>
+              <a:buChar char="–"/>
+            </a:pPr>
+            <a:r>
+              <a:rPr lang="en-US" sz="1650" dirty="0">
+                <a:solidFill>
+                  <a:srgbClr val="23282E"/>
+                </a:solidFill>
+                <a:latin typeface="Corbel" pitchFamily="34" charset="0"/>
+                <a:ea typeface="Corbel" pitchFamily="34" charset="-122"/>
+                <a:cs typeface="Corbel" pitchFamily="34" charset="-120"/>
               </a:rPr>
               <a:t>Classify research by purpose, approach and time dimension</a:t>
             </a:r>
-            <a:endParaRPr lang="en-US" sz="1700" dirty="0"/>
+            <a:endParaRPr lang="en-US" sz="1650" dirty="0"/>
           </a:p>
           <a:p>
             <a:pPr marL="342900" indent="-342900">
               <a:lnSpc>
-                <a:spcPct val="125000"/>
+                <a:spcPct val="130000"/>
               </a:lnSpc>
               <a:spcAft>
-                <a:spcPts val="800"/>
+                <a:spcPts val="1100"/>
               </a:spcAft>
               <a:buSzPct val="100000"/>
-              <a:buChar char="•"/>
-            </a:pPr>
-            <a:r>
-              <a:rPr lang="en-US" sz="1700" dirty="0">
-                <a:solidFill>
-                  <a:srgbClr val="374151"/>
-                </a:solidFill>
+              <a:buChar char="–"/>
+            </a:pPr>
+            <a:r>
+              <a:rPr lang="en-US" sz="1650" dirty="0">
+                <a:solidFill>
+                  <a:srgbClr val="23282E"/>
+                </a:solidFill>
+                <a:latin typeface="Corbel" pitchFamily="34" charset="0"/>
+                <a:ea typeface="Corbel" pitchFamily="34" charset="-122"/>
+                <a:cs typeface="Corbel" pitchFamily="34" charset="-120"/>
               </a:rPr>
               <a:t>Explain the difference between positivist, interpretivist and pragmatic paradigms</a:t>
             </a:r>
-            <a:endParaRPr lang="en-US" sz="1700" dirty="0"/>
+            <a:endParaRPr lang="en-US" sz="1650" dirty="0"/>
           </a:p>
           <a:p>
             <a:pPr marL="342900" indent="-342900">
               <a:lnSpc>
-                <a:spcPct val="125000"/>
+                <a:spcPct val="130000"/>
               </a:lnSpc>
               <a:spcAft>
-                <a:spcPts val="800"/>
+                <a:spcPts val="1100"/>
               </a:spcAft>
               <a:buSzPct val="100000"/>
-              <a:buChar char="•"/>
-            </a:pPr>
-            <a:r>
-              <a:rPr lang="en-US" sz="1700" dirty="0">
-                <a:solidFill>
-                  <a:srgbClr val="374151"/>
-                </a:solidFill>
+              <a:buChar char="–"/>
+            </a:pPr>
+            <a:r>
+              <a:rPr lang="en-US" sz="1650" dirty="0">
+                <a:solidFill>
+                  <a:srgbClr val="23282E"/>
+                </a:solidFill>
+                <a:latin typeface="Corbel" pitchFamily="34" charset="0"/>
+                <a:ea typeface="Corbel" pitchFamily="34" charset="-122"/>
+                <a:cs typeface="Corbel" pitchFamily="34" charset="-120"/>
               </a:rPr>
               <a:t>Trace how a paradigm constrains the designs available to you</a:t>
             </a:r>
-            <a:endParaRPr lang="en-US" sz="1700" dirty="0"/>
+            <a:endParaRPr lang="en-US" sz="1650" dirty="0"/>
           </a:p>
           <a:p>
             <a:pPr marL="342900" indent="-342900">
               <a:lnSpc>
-                <a:spcPct val="125000"/>
+                <a:spcPct val="130000"/>
               </a:lnSpc>
               <a:spcAft>
-                <a:spcPts val="800"/>
+                <a:spcPts val="1100"/>
               </a:spcAft>
               <a:buSzPct val="100000"/>
-              <a:buChar char="•"/>
-            </a:pPr>
-            <a:r>
-              <a:rPr lang="en-US" sz="1700" dirty="0">
-                <a:solidFill>
-                  <a:srgbClr val="374151"/>
-                </a:solidFill>
+              <a:buChar char="–"/>
+            </a:pPr>
+            <a:r>
+              <a:rPr lang="en-US" sz="1650" dirty="0">
+                <a:solidFill>
+                  <a:srgbClr val="23282E"/>
+                </a:solidFill>
+                <a:latin typeface="Corbel" pitchFamily="34" charset="0"/>
+                <a:ea typeface="Corbel" pitchFamily="34" charset="-122"/>
+                <a:cs typeface="Corbel" pitchFamily="34" charset="-120"/>
               </a:rPr>
               <a:t>Describe the stages of the research process end to end</a:t>
             </a:r>
-            <a:endParaRPr lang="en-US" sz="1700" dirty="0"/>
+            <a:endParaRPr lang="en-US" sz="1650" dirty="0"/>
           </a:p>
         </p:txBody>
       </p:sp>
@@ -4912,8 +5222,8 @@
         </p:nvSpPr>
         <p:spPr>
           <a:xfrm>
-            <a:off x="8503920" y="4709160"/>
-            <a:ext cx="800000" cy="300000"/>
+            <a:off x="566928" y="4700016"/>
+            <a:ext cx="914400" cy="274320"/>
           </a:xfrm>
           <a:prstGeom prst="rect">
             <a:avLst/>
@@ -4928,10 +5238,13 @@
           <a:bodyPr/>
           <a:lstStyle>
             <a:lvl1pPr>
-              <a:defRPr sz="1000">
-                <a:solidFill>
-                  <a:srgbClr val="6B7280"/>
-                </a:solidFill>
+              <a:defRPr sz="900">
+                <a:solidFill>
+                  <a:srgbClr val="5F6B76"/>
+                </a:solidFill>
+                <a:latin typeface="Corbel"/>
+                <a:ea typeface="Corbel"/>
+                <a:cs typeface="Corbel"/>
               </a:defRPr>
             </a:lvl1pPr>
           </a:lstStyle>
@@ -4978,8 +5291,8 @@
         </p:nvSpPr>
         <p:spPr>
           <a:xfrm>
-            <a:off x="502920" y="292608"/>
-            <a:ext cx="8046720" cy="228600"/>
+            <a:off x="566928" y="384048"/>
+            <a:ext cx="7772400" cy="237744"/>
           </a:xfrm>
           <a:prstGeom prst="rect">
             <a:avLst/>
@@ -4995,14 +5308,17 @@
               <a:buNone/>
             </a:pPr>
             <a:r>
-              <a:rPr lang="en-US" sz="1100" b="1" spc="150" kern="0" dirty="0">
-                <a:solidFill>
-                  <a:srgbClr val="0066CC"/>
-                </a:solidFill>
+              <a:rPr lang="en-US" sz="1000" spc="200" kern="0" dirty="0">
+                <a:solidFill>
+                  <a:srgbClr val="9A6A3C"/>
+                </a:solidFill>
+                <a:latin typeface="Corbel" pitchFamily="34" charset="0"/>
+                <a:ea typeface="Corbel" pitchFamily="34" charset="-122"/>
+                <a:cs typeface="Corbel" pitchFamily="34" charset="-120"/>
               </a:rPr>
               <a:t>UNIT 1</a:t>
             </a:r>
-            <a:endParaRPr lang="en-US" sz="1100" dirty="0"/>
+            <a:endParaRPr lang="en-US" sz="1000" dirty="0"/>
           </a:p>
         </p:txBody>
       </p:sp>
@@ -5014,8 +5330,8 @@
         </p:nvSpPr>
         <p:spPr>
           <a:xfrm>
-            <a:off x="502920" y="548640"/>
-            <a:ext cx="8046720" cy="640080"/>
+            <a:off x="566928" y="658368"/>
+            <a:ext cx="7772400" cy="658368"/>
           </a:xfrm>
           <a:prstGeom prst="rect">
             <a:avLst/>
@@ -5028,30 +5344,56 @@
           <a:lstStyle/>
           <a:p>
             <a:pPr indent="0" marL="0">
+              <a:lnSpc>
+                <a:spcPct val="100000"/>
+              </a:lnSpc>
               <a:buNone/>
             </a:pPr>
             <a:r>
-              <a:rPr lang="en-US" sz="2400" b="1" dirty="0">
-                <a:solidFill>
-                  <a:srgbClr val="111827"/>
-                </a:solidFill>
+              <a:rPr lang="en-US" sz="2500" dirty="0">
+                <a:solidFill>
+                  <a:srgbClr val="1C3140"/>
+                </a:solidFill>
+                <a:latin typeface="Constantia" pitchFamily="34" charset="0"/>
+                <a:ea typeface="Constantia" pitchFamily="34" charset="-122"/>
+                <a:cs typeface="Constantia" pitchFamily="34" charset="-120"/>
               </a:rPr>
               <a:t>What research is, and is not (1/2)</a:t>
             </a:r>
-            <a:endParaRPr lang="en-US" sz="2400" dirty="0"/>
-          </a:p>
-        </p:txBody>
-      </p:sp>
-      <p:sp>
-        <p:nvSpPr>
-          <p:cNvPr id="4" name="Text 2"/>
+            <a:endParaRPr lang="en-US" sz="2500" dirty="0"/>
+          </a:p>
+        </p:txBody>
+      </p:sp>
+      <p:sp>
+        <p:nvSpPr>
+          <p:cNvPr id="4" name="Shape 2"/>
           <p:cNvSpPr/>
           <p:nvPr/>
         </p:nvSpPr>
         <p:spPr>
           <a:xfrm>
-            <a:off x="685800" y="1325880"/>
-            <a:ext cx="7772400" cy="3200400"/>
+            <a:off x="566928" y="1335024"/>
+            <a:ext cx="566928" cy="20117"/>
+          </a:xfrm>
+          <a:prstGeom prst="rect">
+            <a:avLst/>
+          </a:prstGeom>
+          <a:solidFill>
+            <a:srgbClr val="9A6A3C"/>
+          </a:solidFill>
+          <a:ln/>
+        </p:spPr>
+      </p:sp>
+      <p:sp>
+        <p:nvSpPr>
+          <p:cNvPr id="5" name="Text 3"/>
+          <p:cNvSpPr/>
+          <p:nvPr/>
+        </p:nvSpPr>
+        <p:spPr>
+          <a:xfrm>
+            <a:off x="713232" y="1664208"/>
+            <a:ext cx="7498080" cy="2788920"/>
           </a:xfrm>
           <a:prstGeom prst="rect">
             <a:avLst/>
@@ -5065,19 +5407,22 @@
           <a:p>
             <a:pPr marL="342900" indent="-342900">
               <a:lnSpc>
-                <a:spcPct val="125000"/>
+                <a:spcPct val="130000"/>
               </a:lnSpc>
               <a:spcAft>
-                <a:spcPts val="800"/>
+                <a:spcPts val="1100"/>
               </a:spcAft>
               <a:buSzPct val="100000"/>
-              <a:buChar char="•"/>
+              <a:buChar char="–"/>
             </a:pPr>
             <a:r>
               <a:rPr lang="en-US" sz="1500" dirty="0">
                 <a:solidFill>
-                  <a:srgbClr val="374151"/>
-                </a:solidFill>
+                  <a:srgbClr val="23282E"/>
+                </a:solidFill>
+                <a:latin typeface="Corbel" pitchFamily="34" charset="0"/>
+                <a:ea typeface="Corbel" pitchFamily="34" charset="-122"/>
+                <a:cs typeface="Corbel" pitchFamily="34" charset="-120"/>
               </a:rPr>
               <a:t>Research is systematic, planned enquiry that produces evidence capable of being checked by someone else</a:t>
             </a:r>
@@ -5086,19 +5431,22 @@
           <a:p>
             <a:pPr marL="342900" indent="-342900">
               <a:lnSpc>
-                <a:spcPct val="125000"/>
+                <a:spcPct val="130000"/>
               </a:lnSpc>
               <a:spcAft>
-                <a:spcPts val="800"/>
+                <a:spcPts val="1100"/>
               </a:spcAft>
               <a:buSzPct val="100000"/>
-              <a:buChar char="•"/>
+              <a:buChar char="–"/>
             </a:pPr>
             <a:r>
               <a:rPr lang="en-US" sz="1500" dirty="0">
                 <a:solidFill>
-                  <a:srgbClr val="374151"/>
-                </a:solidFill>
+                  <a:srgbClr val="23282E"/>
+                </a:solidFill>
+                <a:latin typeface="Corbel" pitchFamily="34" charset="0"/>
+                <a:ea typeface="Corbel" pitchFamily="34" charset="-122"/>
+                <a:cs typeface="Corbel" pitchFamily="34" charset="-120"/>
               </a:rPr>
               <a:t>Three features distinguish it: a clear question, a documented method, and conclusions that follow from the data</a:t>
             </a:r>
@@ -5107,19 +5455,22 @@
           <a:p>
             <a:pPr marL="342900" indent="-342900">
               <a:lnSpc>
-                <a:spcPct val="125000"/>
+                <a:spcPct val="130000"/>
               </a:lnSpc>
               <a:spcAft>
-                <a:spcPts val="800"/>
+                <a:spcPts val="1100"/>
               </a:spcAft>
               <a:buSzPct val="100000"/>
-              <a:buChar char="•"/>
+              <a:buChar char="–"/>
             </a:pPr>
             <a:r>
               <a:rPr lang="en-US" sz="1500" dirty="0">
                 <a:solidFill>
-                  <a:srgbClr val="374151"/>
-                </a:solidFill>
+                  <a:srgbClr val="23282E"/>
+                </a:solidFill>
+                <a:latin typeface="Corbel" pitchFamily="34" charset="0"/>
+                <a:ea typeface="Corbel" pitchFamily="34" charset="-122"/>
+                <a:cs typeface="Corbel" pitchFamily="34" charset="-120"/>
               </a:rPr>
               <a:t>It is not: summarising what others said, confirming an opinion you already hold, or collecting data because it is available</a:t>
             </a:r>
@@ -5128,19 +5479,22 @@
           <a:p>
             <a:pPr marL="342900" indent="-342900">
               <a:lnSpc>
-                <a:spcPct val="125000"/>
+                <a:spcPct val="130000"/>
               </a:lnSpc>
               <a:spcAft>
-                <a:spcPts val="800"/>
+                <a:spcPts val="1100"/>
               </a:spcAft>
               <a:buSzPct val="100000"/>
-              <a:buChar char="•"/>
+              <a:buChar char="–"/>
             </a:pPr>
             <a:r>
               <a:rPr lang="en-US" sz="1500" dirty="0">
                 <a:solidFill>
-                  <a:srgbClr val="374151"/>
-                </a:solidFill>
+                  <a:srgbClr val="23282E"/>
+                </a:solidFill>
+                <a:latin typeface="Corbel" pitchFamily="34" charset="0"/>
+                <a:ea typeface="Corbel" pitchFamily="34" charset="-122"/>
+                <a:cs typeface="Corbel" pitchFamily="34" charset="-120"/>
               </a:rPr>
               <a:t>Audit asks "are we meeting an agreed standard?"; research asks "what is the case, and why?"</a:t>
             </a:r>
@@ -5160,8 +5514,8 @@
         </p:nvSpPr>
         <p:spPr>
           <a:xfrm>
-            <a:off x="8503920" y="4709160"/>
-            <a:ext cx="800000" cy="300000"/>
+            <a:off x="566928" y="4700016"/>
+            <a:ext cx="914400" cy="274320"/>
           </a:xfrm>
           <a:prstGeom prst="rect">
             <a:avLst/>
@@ -5176,10 +5530,13 @@
           <a:bodyPr/>
           <a:lstStyle>
             <a:lvl1pPr>
-              <a:defRPr sz="1000">
-                <a:solidFill>
-                  <a:srgbClr val="6B7280"/>
-                </a:solidFill>
+              <a:defRPr sz="900">
+                <a:solidFill>
+                  <a:srgbClr val="5F6B76"/>
+                </a:solidFill>
+                <a:latin typeface="Corbel"/>
+                <a:ea typeface="Corbel"/>
+                <a:cs typeface="Corbel"/>
               </a:defRPr>
             </a:lvl1pPr>
           </a:lstStyle>
@@ -5226,8 +5583,8 @@
         </p:nvSpPr>
         <p:spPr>
           <a:xfrm>
-            <a:off x="502920" y="292608"/>
-            <a:ext cx="8046720" cy="228600"/>
+            <a:off x="566928" y="384048"/>
+            <a:ext cx="7772400" cy="237744"/>
           </a:xfrm>
           <a:prstGeom prst="rect">
             <a:avLst/>
@@ -5243,14 +5600,17 @@
               <a:buNone/>
             </a:pPr>
             <a:r>
-              <a:rPr lang="en-US" sz="1100" b="1" spc="150" kern="0" dirty="0">
-                <a:solidFill>
-                  <a:srgbClr val="0066CC"/>
-                </a:solidFill>
+              <a:rPr lang="en-US" sz="1000" spc="200" kern="0" dirty="0">
+                <a:solidFill>
+                  <a:srgbClr val="9A6A3C"/>
+                </a:solidFill>
+                <a:latin typeface="Corbel" pitchFamily="34" charset="0"/>
+                <a:ea typeface="Corbel" pitchFamily="34" charset="-122"/>
+                <a:cs typeface="Corbel" pitchFamily="34" charset="-120"/>
               </a:rPr>
               <a:t>UNIT 1</a:t>
             </a:r>
-            <a:endParaRPr lang="en-US" sz="1100" dirty="0"/>
+            <a:endParaRPr lang="en-US" sz="1000" dirty="0"/>
           </a:p>
         </p:txBody>
       </p:sp>
@@ -5262,8 +5622,8 @@
         </p:nvSpPr>
         <p:spPr>
           <a:xfrm>
-            <a:off x="502920" y="548640"/>
-            <a:ext cx="8046720" cy="640080"/>
+            <a:off x="566928" y="658368"/>
+            <a:ext cx="7772400" cy="658368"/>
           </a:xfrm>
           <a:prstGeom prst="rect">
             <a:avLst/>
@@ -5276,30 +5636,56 @@
           <a:lstStyle/>
           <a:p>
             <a:pPr indent="0" marL="0">
+              <a:lnSpc>
+                <a:spcPct val="100000"/>
+              </a:lnSpc>
               <a:buNone/>
             </a:pPr>
             <a:r>
-              <a:rPr lang="en-US" sz="2400" b="1" dirty="0">
-                <a:solidFill>
-                  <a:srgbClr val="111827"/>
-                </a:solidFill>
+              <a:rPr lang="en-US" sz="2500" dirty="0">
+                <a:solidFill>
+                  <a:srgbClr val="1C3140"/>
+                </a:solidFill>
+                <a:latin typeface="Constantia" pitchFamily="34" charset="0"/>
+                <a:ea typeface="Constantia" pitchFamily="34" charset="-122"/>
+                <a:cs typeface="Constantia" pitchFamily="34" charset="-120"/>
               </a:rPr>
               <a:t>What research is, and is not (2/2)</a:t>
             </a:r>
-            <a:endParaRPr lang="en-US" sz="2400" dirty="0"/>
-          </a:p>
-        </p:txBody>
-      </p:sp>
-      <p:sp>
-        <p:nvSpPr>
-          <p:cNvPr id="4" name="Text 2"/>
+            <a:endParaRPr lang="en-US" sz="2500" dirty="0"/>
+          </a:p>
+        </p:txBody>
+      </p:sp>
+      <p:sp>
+        <p:nvSpPr>
+          <p:cNvPr id="4" name="Shape 2"/>
           <p:cNvSpPr/>
           <p:nvPr/>
         </p:nvSpPr>
         <p:spPr>
           <a:xfrm>
-            <a:off x="685800" y="1325880"/>
-            <a:ext cx="7772400" cy="3200400"/>
+            <a:off x="566928" y="1335024"/>
+            <a:ext cx="566928" cy="20117"/>
+          </a:xfrm>
+          <a:prstGeom prst="rect">
+            <a:avLst/>
+          </a:prstGeom>
+          <a:solidFill>
+            <a:srgbClr val="9A6A3C"/>
+          </a:solidFill>
+          <a:ln/>
+        </p:spPr>
+      </p:sp>
+      <p:sp>
+        <p:nvSpPr>
+          <p:cNvPr id="5" name="Text 3"/>
+          <p:cNvSpPr/>
+          <p:nvPr/>
+        </p:nvSpPr>
+        <p:spPr>
+          <a:xfrm>
+            <a:off x="713232" y="1664208"/>
+            <a:ext cx="7498080" cy="2788920"/>
           </a:xfrm>
           <a:prstGeom prst="rect">
             <a:avLst/>
@@ -5313,19 +5699,22 @@
           <a:p>
             <a:pPr marL="342900" indent="-342900">
               <a:lnSpc>
-                <a:spcPct val="125000"/>
+                <a:spcPct val="130000"/>
               </a:lnSpc>
               <a:spcAft>
-                <a:spcPts val="800"/>
+                <a:spcPts val="1100"/>
               </a:spcAft>
               <a:buSzPct val="100000"/>
-              <a:buChar char="•"/>
+              <a:buChar char="–"/>
             </a:pPr>
             <a:r>
               <a:rPr lang="en-US" sz="1500" dirty="0">
                 <a:solidFill>
-                  <a:srgbClr val="374151"/>
-                </a:solidFill>
+                  <a:srgbClr val="23282E"/>
+                </a:solidFill>
+                <a:latin typeface="Corbel" pitchFamily="34" charset="0"/>
+                <a:ea typeface="Corbel" pitchFamily="34" charset="-122"/>
+                <a:cs typeface="Corbel" pitchFamily="34" charset="-120"/>
               </a:rPr>
               <a:t>The test of research is reproducibility — could a competent stranger follow your method and reach comparable conclusions?</a:t>
             </a:r>
@@ -5345,8 +5734,8 @@
         </p:nvSpPr>
         <p:spPr>
           <a:xfrm>
-            <a:off x="8503920" y="4709160"/>
-            <a:ext cx="800000" cy="300000"/>
+            <a:off x="566928" y="4700016"/>
+            <a:ext cx="914400" cy="274320"/>
           </a:xfrm>
           <a:prstGeom prst="rect">
             <a:avLst/>
@@ -5361,10 +5750,13 @@
           <a:bodyPr/>
           <a:lstStyle>
             <a:lvl1pPr>
-              <a:defRPr sz="1000">
-                <a:solidFill>
-                  <a:srgbClr val="6B7280"/>
-                </a:solidFill>
+              <a:defRPr sz="900">
+                <a:solidFill>
+                  <a:srgbClr val="5F6B76"/>
+                </a:solidFill>
+                <a:latin typeface="Corbel"/>
+                <a:ea typeface="Corbel"/>
+                <a:cs typeface="Corbel"/>
               </a:defRPr>
             </a:lvl1pPr>
           </a:lstStyle>
@@ -5411,8 +5803,8 @@
         </p:nvSpPr>
         <p:spPr>
           <a:xfrm>
-            <a:off x="502920" y="292608"/>
-            <a:ext cx="8046720" cy="228600"/>
+            <a:off x="566928" y="384048"/>
+            <a:ext cx="7772400" cy="237744"/>
           </a:xfrm>
           <a:prstGeom prst="rect">
             <a:avLst/>
@@ -5428,14 +5820,17 @@
               <a:buNone/>
             </a:pPr>
             <a:r>
-              <a:rPr lang="en-US" sz="1100" b="1" spc="150" kern="0" dirty="0">
-                <a:solidFill>
-                  <a:srgbClr val="00A86B"/>
-                </a:solidFill>
+              <a:rPr lang="en-US" sz="1000" spc="200" kern="0" dirty="0">
+                <a:solidFill>
+                  <a:srgbClr val="9A6A3C"/>
+                </a:solidFill>
+                <a:latin typeface="Corbel" pitchFamily="34" charset="0"/>
+                <a:ea typeface="Corbel" pitchFamily="34" charset="-122"/>
+                <a:cs typeface="Corbel" pitchFamily="34" charset="-120"/>
               </a:rPr>
               <a:t>UNIT 1</a:t>
             </a:r>
-            <a:endParaRPr lang="en-US" sz="1100" dirty="0"/>
+            <a:endParaRPr lang="en-US" sz="1000" dirty="0"/>
           </a:p>
         </p:txBody>
       </p:sp>
@@ -5447,8 +5842,8 @@
         </p:nvSpPr>
         <p:spPr>
           <a:xfrm>
-            <a:off x="502920" y="548640"/>
-            <a:ext cx="8046720" cy="548640"/>
+            <a:off x="566928" y="658368"/>
+            <a:ext cx="7772400" cy="658368"/>
           </a:xfrm>
           <a:prstGeom prst="rect">
             <a:avLst/>
@@ -5457,21 +5852,27 @@
           <a:ln/>
         </p:spPr>
         <p:txBody>
-          <a:bodyPr wrap="square" rtlCol="0" anchor="ctr"/>
+          <a:bodyPr wrap="square" rtlCol="0" anchor="t"/>
           <a:lstStyle/>
           <a:p>
             <a:pPr indent="0" marL="0">
+              <a:lnSpc>
+                <a:spcPct val="100000"/>
+              </a:lnSpc>
               <a:buNone/>
             </a:pPr>
             <a:r>
-              <a:rPr lang="en-US" sz="2400" b="1" dirty="0">
-                <a:solidFill>
-                  <a:srgbClr val="111827"/>
-                </a:solidFill>
+              <a:rPr lang="en-US" sz="2500" dirty="0">
+                <a:solidFill>
+                  <a:srgbClr val="1C3140"/>
+                </a:solidFill>
+                <a:latin typeface="Constantia" pitchFamily="34" charset="0"/>
+                <a:ea typeface="Constantia" pitchFamily="34" charset="-122"/>
+                <a:cs typeface="Constantia" pitchFamily="34" charset="-120"/>
               </a:rPr>
               <a:t>In practice</a:t>
             </a:r>
-            <a:endParaRPr lang="en-US" sz="2400" dirty="0"/>
+            <a:endParaRPr lang="en-US" sz="2500" dirty="0"/>
           </a:p>
         </p:txBody>
       </p:sp>
@@ -5483,28 +5884,48 @@
         </p:nvSpPr>
         <p:spPr>
           <a:xfrm>
-            <a:off x="502920" y="1280160"/>
-            <a:ext cx="54864" cy="2377440"/>
+            <a:off x="566928" y="1335024"/>
+            <a:ext cx="566928" cy="20117"/>
           </a:xfrm>
           <a:prstGeom prst="rect">
             <a:avLst/>
           </a:prstGeom>
           <a:solidFill>
-            <a:srgbClr val="00A86B"/>
+            <a:srgbClr val="9A6A3C"/>
           </a:solidFill>
           <a:ln/>
         </p:spPr>
       </p:sp>
       <p:sp>
         <p:nvSpPr>
-          <p:cNvPr id="5" name="Text 3"/>
+          <p:cNvPr id="5" name="Shape 3"/>
           <p:cNvSpPr/>
           <p:nvPr/>
         </p:nvSpPr>
         <p:spPr>
           <a:xfrm>
-            <a:off x="777240" y="1280160"/>
-            <a:ext cx="7589520" cy="2377440"/>
+            <a:off x="566928" y="1664208"/>
+            <a:ext cx="8010144" cy="2395728"/>
+          </a:xfrm>
+          <a:prstGeom prst="rect">
+            <a:avLst/>
+          </a:prstGeom>
+          <a:solidFill>
+            <a:srgbClr val="F6F4F0"/>
+          </a:solidFill>
+          <a:ln/>
+        </p:spPr>
+      </p:sp>
+      <p:sp>
+        <p:nvSpPr>
+          <p:cNvPr id="6" name="Text 4"/>
+          <p:cNvSpPr/>
+          <p:nvPr/>
+        </p:nvSpPr>
+        <p:spPr>
+          <a:xfrm>
+            <a:off x="932688" y="1847088"/>
+            <a:ext cx="7278624" cy="2029968"/>
           </a:xfrm>
           <a:prstGeom prst="rect">
             <a:avLst/>
@@ -5518,15 +5939,18 @@
           <a:p>
             <a:pPr indent="0" marL="0">
               <a:lnSpc>
-                <a:spcPct val="130000"/>
+                <a:spcPct val="132000"/>
               </a:lnSpc>
               <a:buNone/>
             </a:pPr>
             <a:r>
-              <a:rPr lang="en-US" sz="1600" dirty="0">
-                <a:solidFill>
-                  <a:srgbClr val="374151"/>
-                </a:solidFill>
+              <a:rPr lang="en-US" sz="1600" i="1" dirty="0">
+                <a:solidFill>
+                  <a:srgbClr val="1C3140"/>
+                </a:solidFill>
+                <a:latin typeface="Constantia" pitchFamily="34" charset="0"/>
+                <a:ea typeface="Constantia" pitchFamily="34" charset="-122"/>
+                <a:cs typeface="Constantia" pitchFamily="34" charset="-120"/>
               </a:rPr>
               <a:t>A great deal of published work fails this test. Reviewers increasingly ask for the protocol, the raw data and the analysis code precisely because the written method alone often is not enough to reproduce.</a:t>
             </a:r>
@@ -5546,8 +5970,8 @@
         </p:nvSpPr>
         <p:spPr>
           <a:xfrm>
-            <a:off x="8503920" y="4709160"/>
-            <a:ext cx="800000" cy="300000"/>
+            <a:off x="566928" y="4700016"/>
+            <a:ext cx="914400" cy="274320"/>
           </a:xfrm>
           <a:prstGeom prst="rect">
             <a:avLst/>
@@ -5562,10 +5986,13 @@
           <a:bodyPr/>
           <a:lstStyle>
             <a:lvl1pPr>
-              <a:defRPr sz="1000">
-                <a:solidFill>
-                  <a:srgbClr val="6B7280"/>
-                </a:solidFill>
+              <a:defRPr sz="900">
+                <a:solidFill>
+                  <a:srgbClr val="5F6B76"/>
+                </a:solidFill>
+                <a:latin typeface="Corbel"/>
+                <a:ea typeface="Corbel"/>
+                <a:cs typeface="Corbel"/>
               </a:defRPr>
             </a:lvl1pPr>
           </a:lstStyle>
@@ -5612,8 +6039,8 @@
         </p:nvSpPr>
         <p:spPr>
           <a:xfrm>
-            <a:off x="502920" y="292608"/>
-            <a:ext cx="8046720" cy="228600"/>
+            <a:off x="566928" y="384048"/>
+            <a:ext cx="7772400" cy="237744"/>
           </a:xfrm>
           <a:prstGeom prst="rect">
             <a:avLst/>
@@ -5629,14 +6056,17 @@
               <a:buNone/>
             </a:pPr>
             <a:r>
-              <a:rPr lang="en-US" sz="1100" b="1" spc="150" kern="0" dirty="0">
-                <a:solidFill>
-                  <a:srgbClr val="0066CC"/>
-                </a:solidFill>
+              <a:rPr lang="en-US" sz="1000" spc="200" kern="0" dirty="0">
+                <a:solidFill>
+                  <a:srgbClr val="9A6A3C"/>
+                </a:solidFill>
+                <a:latin typeface="Corbel" pitchFamily="34" charset="0"/>
+                <a:ea typeface="Corbel" pitchFamily="34" charset="-122"/>
+                <a:cs typeface="Corbel" pitchFamily="34" charset="-120"/>
               </a:rPr>
               <a:t>UNIT 1</a:t>
             </a:r>
-            <a:endParaRPr lang="en-US" sz="1100" dirty="0"/>
+            <a:endParaRPr lang="en-US" sz="1000" dirty="0"/>
           </a:p>
         </p:txBody>
       </p:sp>
@@ -5648,8 +6078,8 @@
         </p:nvSpPr>
         <p:spPr>
           <a:xfrm>
-            <a:off x="502920" y="548640"/>
-            <a:ext cx="8046720" cy="640080"/>
+            <a:off x="566928" y="658368"/>
+            <a:ext cx="7772400" cy="658368"/>
           </a:xfrm>
           <a:prstGeom prst="rect">
             <a:avLst/>
@@ -5662,30 +6092,56 @@
           <a:lstStyle/>
           <a:p>
             <a:pPr indent="0" marL="0">
+              <a:lnSpc>
+                <a:spcPct val="100000"/>
+              </a:lnSpc>
               <a:buNone/>
             </a:pPr>
             <a:r>
-              <a:rPr lang="en-US" sz="2400" b="1" dirty="0">
-                <a:solidFill>
-                  <a:srgbClr val="111827"/>
-                </a:solidFill>
+              <a:rPr lang="en-US" sz="2500" dirty="0">
+                <a:solidFill>
+                  <a:srgbClr val="1C3140"/>
+                </a:solidFill>
+                <a:latin typeface="Constantia" pitchFamily="34" charset="0"/>
+                <a:ea typeface="Constantia" pitchFamily="34" charset="-122"/>
+                <a:cs typeface="Constantia" pitchFamily="34" charset="-120"/>
               </a:rPr>
               <a:t>Classifying research (1/2)</a:t>
             </a:r>
-            <a:endParaRPr lang="en-US" sz="2400" dirty="0"/>
-          </a:p>
-        </p:txBody>
-      </p:sp>
-      <p:sp>
-        <p:nvSpPr>
-          <p:cNvPr id="4" name="Text 2"/>
+            <a:endParaRPr lang="en-US" sz="2500" dirty="0"/>
+          </a:p>
+        </p:txBody>
+      </p:sp>
+      <p:sp>
+        <p:nvSpPr>
+          <p:cNvPr id="4" name="Shape 2"/>
           <p:cNvSpPr/>
           <p:nvPr/>
         </p:nvSpPr>
         <p:spPr>
           <a:xfrm>
-            <a:off x="685800" y="1325880"/>
-            <a:ext cx="7772400" cy="3200400"/>
+            <a:off x="566928" y="1335024"/>
+            <a:ext cx="566928" cy="20117"/>
+          </a:xfrm>
+          <a:prstGeom prst="rect">
+            <a:avLst/>
+          </a:prstGeom>
+          <a:solidFill>
+            <a:srgbClr val="9A6A3C"/>
+          </a:solidFill>
+          <a:ln/>
+        </p:spPr>
+      </p:sp>
+      <p:sp>
+        <p:nvSpPr>
+          <p:cNvPr id="5" name="Text 3"/>
+          <p:cNvSpPr/>
+          <p:nvPr/>
+        </p:nvSpPr>
+        <p:spPr>
+          <a:xfrm>
+            <a:off x="713232" y="1664208"/>
+            <a:ext cx="7498080" cy="2788920"/>
           </a:xfrm>
           <a:prstGeom prst="rect">
             <a:avLst/>
@@ -5699,65 +6155,74 @@
           <a:p>
             <a:pPr marL="342900" indent="-342900">
               <a:lnSpc>
-                <a:spcPct val="125000"/>
+                <a:spcPct val="130000"/>
               </a:lnSpc>
               <a:spcAft>
-                <a:spcPts val="800"/>
+                <a:spcPts val="1100"/>
               </a:spcAft>
               <a:buSzPct val="100000"/>
-              <a:buChar char="•"/>
-            </a:pPr>
-            <a:r>
-              <a:rPr lang="en-US" sz="1300" dirty="0">
-                <a:solidFill>
-                  <a:srgbClr val="374151"/>
-                </a:solidFill>
+              <a:buChar char="–"/>
+            </a:pPr>
+            <a:r>
+              <a:rPr lang="en-US" sz="1350" dirty="0">
+                <a:solidFill>
+                  <a:srgbClr val="23282E"/>
+                </a:solidFill>
+                <a:latin typeface="Corbel" pitchFamily="34" charset="0"/>
+                <a:ea typeface="Corbel" pitchFamily="34" charset="-122"/>
+                <a:cs typeface="Corbel" pitchFamily="34" charset="-120"/>
               </a:rPr>
               <a:t>By purpose: exploratory (what is going on here?), descriptive (what is the pattern?), explanatory (why does it happen?), evaluative (did it work?)</a:t>
             </a:r>
-            <a:endParaRPr lang="en-US" sz="1300" dirty="0"/>
+            <a:endParaRPr lang="en-US" sz="1350" dirty="0"/>
           </a:p>
           <a:p>
             <a:pPr marL="342900" indent="-342900">
               <a:lnSpc>
-                <a:spcPct val="125000"/>
+                <a:spcPct val="130000"/>
               </a:lnSpc>
               <a:spcAft>
-                <a:spcPts val="800"/>
+                <a:spcPts val="1100"/>
               </a:spcAft>
               <a:buSzPct val="100000"/>
-              <a:buChar char="•"/>
-            </a:pPr>
-            <a:r>
-              <a:rPr lang="en-US" sz="1300" dirty="0">
-                <a:solidFill>
-                  <a:srgbClr val="374151"/>
-                </a:solidFill>
+              <a:buChar char="–"/>
+            </a:pPr>
+            <a:r>
+              <a:rPr lang="en-US" sz="1350" dirty="0">
+                <a:solidFill>
+                  <a:srgbClr val="23282E"/>
+                </a:solidFill>
+                <a:latin typeface="Corbel" pitchFamily="34" charset="0"/>
+                <a:ea typeface="Corbel" pitchFamily="34" charset="-122"/>
+                <a:cs typeface="Corbel" pitchFamily="34" charset="-120"/>
               </a:rPr>
               <a:t>By approach: quantitative (numbers, measurement, statistical inference), qualitative (meaning, context, interpretation), mixed methods (both, deliberately integrated)</a:t>
             </a:r>
-            <a:endParaRPr lang="en-US" sz="1300" dirty="0"/>
+            <a:endParaRPr lang="en-US" sz="1350" dirty="0"/>
           </a:p>
           <a:p>
             <a:pPr marL="342900" indent="-342900">
               <a:lnSpc>
-                <a:spcPct val="125000"/>
+                <a:spcPct val="130000"/>
               </a:lnSpc>
               <a:spcAft>
-                <a:spcPts val="800"/>
+                <a:spcPts val="1100"/>
               </a:spcAft>
               <a:buSzPct val="100000"/>
-              <a:buChar char="•"/>
-            </a:pPr>
-            <a:r>
-              <a:rPr lang="en-US" sz="1300" dirty="0">
-                <a:solidFill>
-                  <a:srgbClr val="374151"/>
-                </a:solidFill>
+              <a:buChar char="–"/>
+            </a:pPr>
+            <a:r>
+              <a:rPr lang="en-US" sz="1350" dirty="0">
+                <a:solidFill>
+                  <a:srgbClr val="23282E"/>
+                </a:solidFill>
+                <a:latin typeface="Corbel" pitchFamily="34" charset="0"/>
+                <a:ea typeface="Corbel" pitchFamily="34" charset="-122"/>
+                <a:cs typeface="Corbel" pitchFamily="34" charset="-120"/>
               </a:rPr>
               <a:t>By time: cross-sectional (a snapshot), longitudinal (repeated over time), retrospective (looking back), prospective (following forward)</a:t>
             </a:r>
-            <a:endParaRPr lang="en-US" sz="1300" dirty="0"/>
+            <a:endParaRPr lang="en-US" sz="1350" dirty="0"/>
           </a:p>
         </p:txBody>
       </p:sp>
@@ -5773,8 +6238,8 @@
         </p:nvSpPr>
         <p:spPr>
           <a:xfrm>
-            <a:off x="8503920" y="4709160"/>
-            <a:ext cx="800000" cy="300000"/>
+            <a:off x="566928" y="4700016"/>
+            <a:ext cx="914400" cy="274320"/>
           </a:xfrm>
           <a:prstGeom prst="rect">
             <a:avLst/>
@@ -5789,10 +6254,13 @@
           <a:bodyPr/>
           <a:lstStyle>
             <a:lvl1pPr>
-              <a:defRPr sz="1000">
-                <a:solidFill>
-                  <a:srgbClr val="6B7280"/>
-                </a:solidFill>
+              <a:defRPr sz="900">
+                <a:solidFill>
+                  <a:srgbClr val="5F6B76"/>
+                </a:solidFill>
+                <a:latin typeface="Corbel"/>
+                <a:ea typeface="Corbel"/>
+                <a:cs typeface="Corbel"/>
               </a:defRPr>
             </a:lvl1pPr>
           </a:lstStyle>
@@ -5839,8 +6307,8 @@
         </p:nvSpPr>
         <p:spPr>
           <a:xfrm>
-            <a:off x="502920" y="292608"/>
-            <a:ext cx="8046720" cy="228600"/>
+            <a:off x="566928" y="384048"/>
+            <a:ext cx="7772400" cy="237744"/>
           </a:xfrm>
           <a:prstGeom prst="rect">
             <a:avLst/>
@@ -5856,14 +6324,17 @@
               <a:buNone/>
             </a:pPr>
             <a:r>
-              <a:rPr lang="en-US" sz="1100" b="1" spc="150" kern="0" dirty="0">
-                <a:solidFill>
-                  <a:srgbClr val="0066CC"/>
-                </a:solidFill>
+              <a:rPr lang="en-US" sz="1000" spc="200" kern="0" dirty="0">
+                <a:solidFill>
+                  <a:srgbClr val="9A6A3C"/>
+                </a:solidFill>
+                <a:latin typeface="Corbel" pitchFamily="34" charset="0"/>
+                <a:ea typeface="Corbel" pitchFamily="34" charset="-122"/>
+                <a:cs typeface="Corbel" pitchFamily="34" charset="-120"/>
               </a:rPr>
               <a:t>UNIT 1</a:t>
             </a:r>
-            <a:endParaRPr lang="en-US" sz="1100" dirty="0"/>
+            <a:endParaRPr lang="en-US" sz="1000" dirty="0"/>
           </a:p>
         </p:txBody>
       </p:sp>
@@ -5875,8 +6346,8 @@
         </p:nvSpPr>
         <p:spPr>
           <a:xfrm>
-            <a:off x="502920" y="548640"/>
-            <a:ext cx="8046720" cy="640080"/>
+            <a:off x="566928" y="658368"/>
+            <a:ext cx="7772400" cy="658368"/>
           </a:xfrm>
           <a:prstGeom prst="rect">
             <a:avLst/>
@@ -5889,30 +6360,56 @@
           <a:lstStyle/>
           <a:p>
             <a:pPr indent="0" marL="0">
+              <a:lnSpc>
+                <a:spcPct val="100000"/>
+              </a:lnSpc>
               <a:buNone/>
             </a:pPr>
             <a:r>
-              <a:rPr lang="en-US" sz="2400" b="1" dirty="0">
-                <a:solidFill>
-                  <a:srgbClr val="111827"/>
-                </a:solidFill>
+              <a:rPr lang="en-US" sz="2500" dirty="0">
+                <a:solidFill>
+                  <a:srgbClr val="1C3140"/>
+                </a:solidFill>
+                <a:latin typeface="Constantia" pitchFamily="34" charset="0"/>
+                <a:ea typeface="Constantia" pitchFamily="34" charset="-122"/>
+                <a:cs typeface="Constantia" pitchFamily="34" charset="-120"/>
               </a:rPr>
               <a:t>Classifying research (2/2)</a:t>
             </a:r>
-            <a:endParaRPr lang="en-US" sz="2400" dirty="0"/>
-          </a:p>
-        </p:txBody>
-      </p:sp>
-      <p:sp>
-        <p:nvSpPr>
-          <p:cNvPr id="4" name="Text 2"/>
+            <a:endParaRPr lang="en-US" sz="2500" dirty="0"/>
+          </a:p>
+        </p:txBody>
+      </p:sp>
+      <p:sp>
+        <p:nvSpPr>
+          <p:cNvPr id="4" name="Shape 2"/>
           <p:cNvSpPr/>
           <p:nvPr/>
         </p:nvSpPr>
         <p:spPr>
           <a:xfrm>
-            <a:off x="685800" y="1325880"/>
-            <a:ext cx="7772400" cy="3200400"/>
+            <a:off x="566928" y="1335024"/>
+            <a:ext cx="566928" cy="20117"/>
+          </a:xfrm>
+          <a:prstGeom prst="rect">
+            <a:avLst/>
+          </a:prstGeom>
+          <a:solidFill>
+            <a:srgbClr val="9A6A3C"/>
+          </a:solidFill>
+          <a:ln/>
+        </p:spPr>
+      </p:sp>
+      <p:sp>
+        <p:nvSpPr>
+          <p:cNvPr id="5" name="Text 3"/>
+          <p:cNvSpPr/>
+          <p:nvPr/>
+        </p:nvSpPr>
+        <p:spPr>
+          <a:xfrm>
+            <a:off x="713232" y="1664208"/>
+            <a:ext cx="7498080" cy="2788920"/>
           </a:xfrm>
           <a:prstGeom prst="rect">
             <a:avLst/>
@@ -5926,44 +6423,50 @@
           <a:p>
             <a:pPr marL="342900" indent="-342900">
               <a:lnSpc>
-                <a:spcPct val="125000"/>
+                <a:spcPct val="130000"/>
               </a:lnSpc>
               <a:spcAft>
-                <a:spcPts val="800"/>
+                <a:spcPts val="1100"/>
               </a:spcAft>
               <a:buSzPct val="100000"/>
-              <a:buChar char="•"/>
-            </a:pPr>
-            <a:r>
-              <a:rPr lang="en-US" sz="1700" dirty="0">
-                <a:solidFill>
-                  <a:srgbClr val="374151"/>
-                </a:solidFill>
+              <a:buChar char="–"/>
+            </a:pPr>
+            <a:r>
+              <a:rPr lang="en-US" sz="1650" dirty="0">
+                <a:solidFill>
+                  <a:srgbClr val="23282E"/>
+                </a:solidFill>
+                <a:latin typeface="Corbel" pitchFamily="34" charset="0"/>
+                <a:ea typeface="Corbel" pitchFamily="34" charset="-122"/>
+                <a:cs typeface="Corbel" pitchFamily="34" charset="-120"/>
               </a:rPr>
               <a:t>By setting: laboratory, field, clinical, desk-based or secondary analysis</a:t>
             </a:r>
-            <a:endParaRPr lang="en-US" sz="1700" dirty="0"/>
+            <a:endParaRPr lang="en-US" sz="1650" dirty="0"/>
           </a:p>
           <a:p>
             <a:pPr marL="342900" indent="-342900">
               <a:lnSpc>
-                <a:spcPct val="125000"/>
+                <a:spcPct val="130000"/>
               </a:lnSpc>
               <a:spcAft>
-                <a:spcPts val="800"/>
+                <a:spcPts val="1100"/>
               </a:spcAft>
               <a:buSzPct val="100000"/>
-              <a:buChar char="•"/>
-            </a:pPr>
-            <a:r>
-              <a:rPr lang="en-US" sz="1700" dirty="0">
-                <a:solidFill>
-                  <a:srgbClr val="374151"/>
-                </a:solidFill>
+              <a:buChar char="–"/>
+            </a:pPr>
+            <a:r>
+              <a:rPr lang="en-US" sz="1650" dirty="0">
+                <a:solidFill>
+                  <a:srgbClr val="23282E"/>
+                </a:solidFill>
+                <a:latin typeface="Corbel" pitchFamily="34" charset="0"/>
+                <a:ea typeface="Corbel" pitchFamily="34" charset="-122"/>
+                <a:cs typeface="Corbel" pitchFamily="34" charset="-120"/>
               </a:rPr>
               <a:t>By application: basic (extends knowledge) versus applied (solves a defined problem)</a:t>
             </a:r>
-            <a:endParaRPr lang="en-US" sz="1700" dirty="0"/>
+            <a:endParaRPr lang="en-US" sz="1650" dirty="0"/>
           </a:p>
         </p:txBody>
       </p:sp>
@@ -5979,8 +6482,8 @@
         </p:nvSpPr>
         <p:spPr>
           <a:xfrm>
-            <a:off x="8503920" y="4709160"/>
-            <a:ext cx="800000" cy="300000"/>
+            <a:off x="566928" y="4700016"/>
+            <a:ext cx="914400" cy="274320"/>
           </a:xfrm>
           <a:prstGeom prst="rect">
             <a:avLst/>
@@ -5995,10 +6498,13 @@
           <a:bodyPr/>
           <a:lstStyle>
             <a:lvl1pPr>
-              <a:defRPr sz="1000">
-                <a:solidFill>
-                  <a:srgbClr val="6B7280"/>
-                </a:solidFill>
+              <a:defRPr sz="900">
+                <a:solidFill>
+                  <a:srgbClr val="5F6B76"/>
+                </a:solidFill>
+                <a:latin typeface="Corbel"/>
+                <a:ea typeface="Corbel"/>
+                <a:cs typeface="Corbel"/>
               </a:defRPr>
             </a:lvl1pPr>
           </a:lstStyle>
@@ -6045,8 +6551,8 @@
         </p:nvSpPr>
         <p:spPr>
           <a:xfrm>
-            <a:off x="502920" y="292608"/>
-            <a:ext cx="8046720" cy="228600"/>
+            <a:off x="566928" y="384048"/>
+            <a:ext cx="7772400" cy="237744"/>
           </a:xfrm>
           <a:prstGeom prst="rect">
             <a:avLst/>
@@ -6062,14 +6568,17 @@
               <a:buNone/>
             </a:pPr>
             <a:r>
-              <a:rPr lang="en-US" sz="1100" b="1" spc="150" kern="0" dirty="0">
-                <a:solidFill>
-                  <a:srgbClr val="0066CC"/>
-                </a:solidFill>
+              <a:rPr lang="en-US" sz="1000" spc="200" kern="0" dirty="0">
+                <a:solidFill>
+                  <a:srgbClr val="9A6A3C"/>
+                </a:solidFill>
+                <a:latin typeface="Corbel" pitchFamily="34" charset="0"/>
+                <a:ea typeface="Corbel" pitchFamily="34" charset="-122"/>
+                <a:cs typeface="Corbel" pitchFamily="34" charset="-120"/>
               </a:rPr>
               <a:t>UNIT 1</a:t>
             </a:r>
-            <a:endParaRPr lang="en-US" sz="1100" dirty="0"/>
+            <a:endParaRPr lang="en-US" sz="1000" dirty="0"/>
           </a:p>
         </p:txBody>
       </p:sp>
@@ -6081,8 +6590,8 @@
         </p:nvSpPr>
         <p:spPr>
           <a:xfrm>
-            <a:off x="502920" y="548640"/>
-            <a:ext cx="8046720" cy="640080"/>
+            <a:off x="566928" y="658368"/>
+            <a:ext cx="7772400" cy="658368"/>
           </a:xfrm>
           <a:prstGeom prst="rect">
             <a:avLst/>
@@ -6095,30 +6604,56 @@
           <a:lstStyle/>
           <a:p>
             <a:pPr indent="0" marL="0">
+              <a:lnSpc>
+                <a:spcPct val="100000"/>
+              </a:lnSpc>
               <a:buNone/>
             </a:pPr>
             <a:r>
-              <a:rPr lang="en-US" sz="2400" b="1" dirty="0">
-                <a:solidFill>
-                  <a:srgbClr val="111827"/>
-                </a:solidFill>
+              <a:rPr lang="en-US" sz="2500" dirty="0">
+                <a:solidFill>
+                  <a:srgbClr val="1C3140"/>
+                </a:solidFill>
+                <a:latin typeface="Constantia" pitchFamily="34" charset="0"/>
+                <a:ea typeface="Constantia" pitchFamily="34" charset="-122"/>
+                <a:cs typeface="Constantia" pitchFamily="34" charset="-120"/>
               </a:rPr>
               <a:t>Paradigms: the assumptions underneath the method (1/2)</a:t>
             </a:r>
-            <a:endParaRPr lang="en-US" sz="2400" dirty="0"/>
-          </a:p>
-        </p:txBody>
-      </p:sp>
-      <p:sp>
-        <p:nvSpPr>
-          <p:cNvPr id="4" name="Text 2"/>
+            <a:endParaRPr lang="en-US" sz="2500" dirty="0"/>
+          </a:p>
+        </p:txBody>
+      </p:sp>
+      <p:sp>
+        <p:nvSpPr>
+          <p:cNvPr id="4" name="Shape 2"/>
           <p:cNvSpPr/>
           <p:nvPr/>
         </p:nvSpPr>
         <p:spPr>
           <a:xfrm>
-            <a:off x="685800" y="1325880"/>
-            <a:ext cx="7772400" cy="3200400"/>
+            <a:off x="566928" y="1335024"/>
+            <a:ext cx="566928" cy="20117"/>
+          </a:xfrm>
+          <a:prstGeom prst="rect">
+            <a:avLst/>
+          </a:prstGeom>
+          <a:solidFill>
+            <a:srgbClr val="9A6A3C"/>
+          </a:solidFill>
+          <a:ln/>
+        </p:spPr>
+      </p:sp>
+      <p:sp>
+        <p:nvSpPr>
+          <p:cNvPr id="5" name="Text 3"/>
+          <p:cNvSpPr/>
+          <p:nvPr/>
+        </p:nvSpPr>
+        <p:spPr>
+          <a:xfrm>
+            <a:off x="713232" y="1664208"/>
+            <a:ext cx="7498080" cy="2788920"/>
           </a:xfrm>
           <a:prstGeom prst="rect">
             <a:avLst/>
@@ -6132,19 +6667,22 @@
           <a:p>
             <a:pPr marL="342900" indent="-342900">
               <a:lnSpc>
-                <a:spcPct val="125000"/>
+                <a:spcPct val="130000"/>
               </a:lnSpc>
               <a:spcAft>
-                <a:spcPts val="800"/>
+                <a:spcPts val="1100"/>
               </a:spcAft>
               <a:buSzPct val="100000"/>
-              <a:buChar char="•"/>
+              <a:buChar char="–"/>
             </a:pPr>
             <a:r>
               <a:rPr lang="en-US" sz="1500" dirty="0">
                 <a:solidFill>
-                  <a:srgbClr val="374151"/>
-                </a:solidFill>
+                  <a:srgbClr val="23282E"/>
+                </a:solidFill>
+                <a:latin typeface="Corbel" pitchFamily="34" charset="0"/>
+                <a:ea typeface="Corbel" pitchFamily="34" charset="-122"/>
+                <a:cs typeface="Corbel" pitchFamily="34" charset="-120"/>
               </a:rPr>
               <a:t>Ontology asks what reality is: a single objective reality, or multiple realities constructed by participants?</a:t>
             </a:r>
@@ -6153,19 +6691,22 @@
           <a:p>
             <a:pPr marL="342900" indent="-342900">
               <a:lnSpc>
-                <a:spcPct val="125000"/>
+                <a:spcPct val="130000"/>
               </a:lnSpc>
               <a:spcAft>
-                <a:spcPts val="800"/>
+                <a:spcPts val="1100"/>
               </a:spcAft>
               <a:buSzPct val="100000"/>
-              <a:buChar char="•"/>
+              <a:buChar char="–"/>
             </a:pPr>
             <a:r>
               <a:rPr lang="en-US" sz="1500" dirty="0">
                 <a:solidFill>
-                  <a:srgbClr val="374151"/>
-                </a:solidFill>
+                  <a:srgbClr val="23282E"/>
+                </a:solidFill>
+                <a:latin typeface="Corbel" pitchFamily="34" charset="0"/>
+                <a:ea typeface="Corbel" pitchFamily="34" charset="-122"/>
+                <a:cs typeface="Corbel" pitchFamily="34" charset="-120"/>
               </a:rPr>
               <a:t>Epistemology asks how we can know it: by measuring from the outside, or by interpreting from within?</a:t>
             </a:r>
@@ -6174,19 +6715,22 @@
           <a:p>
             <a:pPr marL="342900" indent="-342900">
               <a:lnSpc>
-                <a:spcPct val="125000"/>
+                <a:spcPct val="130000"/>
               </a:lnSpc>
               <a:spcAft>
-                <a:spcPts val="800"/>
+                <a:spcPts val="1100"/>
               </a:spcAft>
               <a:buSzPct val="100000"/>
-              <a:buChar char="•"/>
+              <a:buChar char="–"/>
             </a:pPr>
             <a:r>
               <a:rPr lang="en-US" sz="1500" dirty="0">
                 <a:solidFill>
-                  <a:srgbClr val="374151"/>
-                </a:solidFill>
+                  <a:srgbClr val="23282E"/>
+                </a:solidFill>
+                <a:latin typeface="Corbel" pitchFamily="34" charset="0"/>
+                <a:ea typeface="Corbel" pitchFamily="34" charset="-122"/>
+                <a:cs typeface="Corbel" pitchFamily="34" charset="-120"/>
               </a:rPr>
               <a:t>Positivism assumes an objective reality that can be measured — it leads naturally to experiments, surveys and statistical inference</a:t>
             </a:r>
@@ -6195,19 +6739,22 @@
           <a:p>
             <a:pPr marL="342900" indent="-342900">
               <a:lnSpc>
-                <a:spcPct val="125000"/>
+                <a:spcPct val="130000"/>
               </a:lnSpc>
               <a:spcAft>
-                <a:spcPts val="800"/>
+                <a:spcPts val="1100"/>
               </a:spcAft>
               <a:buSzPct val="100000"/>
-              <a:buChar char="•"/>
+              <a:buChar char="–"/>
             </a:pPr>
             <a:r>
               <a:rPr lang="en-US" sz="1500" dirty="0">
                 <a:solidFill>
-                  <a:srgbClr val="374151"/>
-                </a:solidFill>
+                  <a:srgbClr val="23282E"/>
+                </a:solidFill>
+                <a:latin typeface="Corbel" pitchFamily="34" charset="0"/>
+                <a:ea typeface="Corbel" pitchFamily="34" charset="-122"/>
+                <a:cs typeface="Corbel" pitchFamily="34" charset="-120"/>
               </a:rPr>
               <a:t>Interpretivism assumes reality is socially constructed — it leads to interviews, observation and thematic interpretation</a:t>
             </a:r>
@@ -6227,8 +6774,8 @@
         </p:nvSpPr>
         <p:spPr>
           <a:xfrm>
-            <a:off x="8503920" y="4709160"/>
-            <a:ext cx="800000" cy="300000"/>
+            <a:off x="566928" y="4700016"/>
+            <a:ext cx="914400" cy="274320"/>
           </a:xfrm>
           <a:prstGeom prst="rect">
             <a:avLst/>
@@ -6243,10 +6790,13 @@
           <a:bodyPr/>
           <a:lstStyle>
             <a:lvl1pPr>
-              <a:defRPr sz="1000">
-                <a:solidFill>
-                  <a:srgbClr val="6B7280"/>
-                </a:solidFill>
+              <a:defRPr sz="900">
+                <a:solidFill>
+                  <a:srgbClr val="5F6B76"/>
+                </a:solidFill>
+                <a:latin typeface="Corbel"/>
+                <a:ea typeface="Corbel"/>
+                <a:cs typeface="Corbel"/>
               </a:defRPr>
             </a:lvl1pPr>
           </a:lstStyle>
@@ -6293,8 +6843,8 @@
         </p:nvSpPr>
         <p:spPr>
           <a:xfrm>
-            <a:off x="502920" y="292608"/>
-            <a:ext cx="8046720" cy="228600"/>
+            <a:off x="566928" y="384048"/>
+            <a:ext cx="7772400" cy="237744"/>
           </a:xfrm>
           <a:prstGeom prst="rect">
             <a:avLst/>
@@ -6310,14 +6860,17 @@
               <a:buNone/>
             </a:pPr>
             <a:r>
-              <a:rPr lang="en-US" sz="1100" b="1" spc="150" kern="0" dirty="0">
-                <a:solidFill>
-                  <a:srgbClr val="0066CC"/>
-                </a:solidFill>
+              <a:rPr lang="en-US" sz="1000" spc="200" kern="0" dirty="0">
+                <a:solidFill>
+                  <a:srgbClr val="9A6A3C"/>
+                </a:solidFill>
+                <a:latin typeface="Corbel" pitchFamily="34" charset="0"/>
+                <a:ea typeface="Corbel" pitchFamily="34" charset="-122"/>
+                <a:cs typeface="Corbel" pitchFamily="34" charset="-120"/>
               </a:rPr>
               <a:t>UNIT 1</a:t>
             </a:r>
-            <a:endParaRPr lang="en-US" sz="1100" dirty="0"/>
+            <a:endParaRPr lang="en-US" sz="1000" dirty="0"/>
           </a:p>
         </p:txBody>
       </p:sp>
@@ -6329,8 +6882,8 @@
         </p:nvSpPr>
         <p:spPr>
           <a:xfrm>
-            <a:off x="502920" y="548640"/>
-            <a:ext cx="8046720" cy="640080"/>
+            <a:off x="566928" y="658368"/>
+            <a:ext cx="7772400" cy="658368"/>
           </a:xfrm>
           <a:prstGeom prst="rect">
             <a:avLst/>
@@ -6343,30 +6896,56 @@
           <a:lstStyle/>
           <a:p>
             <a:pPr indent="0" marL="0">
+              <a:lnSpc>
+                <a:spcPct val="100000"/>
+              </a:lnSpc>
               <a:buNone/>
             </a:pPr>
             <a:r>
-              <a:rPr lang="en-US" sz="2400" b="1" dirty="0">
-                <a:solidFill>
-                  <a:srgbClr val="111827"/>
-                </a:solidFill>
+              <a:rPr lang="en-US" sz="2500" dirty="0">
+                <a:solidFill>
+                  <a:srgbClr val="1C3140"/>
+                </a:solidFill>
+                <a:latin typeface="Constantia" pitchFamily="34" charset="0"/>
+                <a:ea typeface="Constantia" pitchFamily="34" charset="-122"/>
+                <a:cs typeface="Constantia" pitchFamily="34" charset="-120"/>
               </a:rPr>
               <a:t>Paradigms: the assumptions underneath the method (2/2)</a:t>
             </a:r>
-            <a:endParaRPr lang="en-US" sz="2400" dirty="0"/>
-          </a:p>
-        </p:txBody>
-      </p:sp>
-      <p:sp>
-        <p:nvSpPr>
-          <p:cNvPr id="4" name="Text 2"/>
+            <a:endParaRPr lang="en-US" sz="2500" dirty="0"/>
+          </a:p>
+        </p:txBody>
+      </p:sp>
+      <p:sp>
+        <p:nvSpPr>
+          <p:cNvPr id="4" name="Shape 2"/>
           <p:cNvSpPr/>
           <p:nvPr/>
         </p:nvSpPr>
         <p:spPr>
           <a:xfrm>
-            <a:off x="685800" y="1325880"/>
-            <a:ext cx="7772400" cy="3200400"/>
+            <a:off x="566928" y="1335024"/>
+            <a:ext cx="566928" cy="20117"/>
+          </a:xfrm>
+          <a:prstGeom prst="rect">
+            <a:avLst/>
+          </a:prstGeom>
+          <a:solidFill>
+            <a:srgbClr val="9A6A3C"/>
+          </a:solidFill>
+          <a:ln/>
+        </p:spPr>
+      </p:sp>
+      <p:sp>
+        <p:nvSpPr>
+          <p:cNvPr id="5" name="Text 3"/>
+          <p:cNvSpPr/>
+          <p:nvPr/>
+        </p:nvSpPr>
+        <p:spPr>
+          <a:xfrm>
+            <a:off x="713232" y="1664208"/>
+            <a:ext cx="7498080" cy="2788920"/>
           </a:xfrm>
           <a:prstGeom prst="rect">
             <a:avLst/>
@@ -6380,19 +6959,22 @@
           <a:p>
             <a:pPr marL="342900" indent="-342900">
               <a:lnSpc>
-                <a:spcPct val="125000"/>
+                <a:spcPct val="130000"/>
               </a:lnSpc>
               <a:spcAft>
-                <a:spcPts val="800"/>
+                <a:spcPts val="1100"/>
               </a:spcAft>
               <a:buSzPct val="100000"/>
-              <a:buChar char="•"/>
+              <a:buChar char="–"/>
             </a:pPr>
             <a:r>
               <a:rPr lang="en-US" sz="1500" dirty="0">
                 <a:solidFill>
-                  <a:srgbClr val="374151"/>
-                </a:solidFill>
+                  <a:srgbClr val="23282E"/>
+                </a:solidFill>
+                <a:latin typeface="Corbel" pitchFamily="34" charset="0"/>
+                <a:ea typeface="Corbel" pitchFamily="34" charset="-122"/>
+                <a:cs typeface="Corbel" pitchFamily="34" charset="-120"/>
               </a:rPr>
               <a:t>Pragmatism asks what works for the question at hand, and is the usual justification for mixed methods</a:t>
             </a:r>
@@ -6401,19 +6983,22 @@
           <a:p>
             <a:pPr marL="342900" indent="-342900">
               <a:lnSpc>
-                <a:spcPct val="125000"/>
+                <a:spcPct val="130000"/>
               </a:lnSpc>
               <a:spcAft>
-                <a:spcPts val="800"/>
+                <a:spcPts val="1100"/>
               </a:spcAft>
               <a:buSzPct val="100000"/>
-              <a:buChar char="•"/>
+              <a:buChar char="–"/>
             </a:pPr>
             <a:r>
               <a:rPr lang="en-US" sz="1500" dirty="0">
                 <a:solidFill>
-                  <a:srgbClr val="374151"/>
-                </a:solidFill>
+                  <a:srgbClr val="23282E"/>
+                </a:solidFill>
+                <a:latin typeface="Corbel" pitchFamily="34" charset="0"/>
+                <a:ea typeface="Corbel" pitchFamily="34" charset="-122"/>
+                <a:cs typeface="Corbel" pitchFamily="34" charset="-120"/>
               </a:rPr>
               <a:t>Critical and transformative paradigms foreground power and aim at change, common in participatory and action research</a:t>
             </a:r>
@@ -6433,8 +7018,8 @@
         </p:nvSpPr>
         <p:spPr>
           <a:xfrm>
-            <a:off x="8503920" y="4709160"/>
-            <a:ext cx="800000" cy="300000"/>
+            <a:off x="566928" y="4700016"/>
+            <a:ext cx="914400" cy="274320"/>
           </a:xfrm>
           <a:prstGeom prst="rect">
             <a:avLst/>
@@ -6449,10 +7034,13 @@
           <a:bodyPr/>
           <a:lstStyle>
             <a:lvl1pPr>
-              <a:defRPr sz="1000">
-                <a:solidFill>
-                  <a:srgbClr val="6B7280"/>
-                </a:solidFill>
+              <a:defRPr sz="900">
+                <a:solidFill>
+                  <a:srgbClr val="5F6B76"/>
+                </a:solidFill>
+                <a:latin typeface="Corbel"/>
+                <a:ea typeface="Corbel"/>
+                <a:cs typeface="Corbel"/>
               </a:defRPr>
             </a:lvl1pPr>
           </a:lstStyle>
@@ -6517,7 +7105,7 @@
     </a:clrScheme>
     <a:fontScheme name="Office">
       <a:majorFont>
-        <a:latin typeface="Calibri Light" panose="020F0302020204030204"/>
+        <a:latin typeface="Constantia"/>
         <a:ea typeface=""/>
         <a:cs typeface=""/>
         <a:font script="Jpan" typeface="游ゴシック Light"/>
@@ -6569,7 +7157,7 @@
         <a:font script="Tfng" typeface="Ebrima"/>
       </a:majorFont>
       <a:minorFont>
-        <a:latin typeface="Calibri" panose="020F0502020204030204"/>
+        <a:latin typeface="Corbel"/>
         <a:ea typeface=""/>
         <a:cs typeface=""/>
         <a:font script="Jpan" typeface="游ゴシック"/>
